--- a/R 스타일 팩키지를 이용한 선형 회귀분석.pptx
+++ b/R 스타일 팩키지를 이용한 선형 회귀분석.pptx
@@ -7,14 +7,33 @@
   <p:sldIdLst>
     <p:sldId id="256" r:id="rId2"/>
     <p:sldId id="257" r:id="rId3"/>
-    <p:sldId id="258" r:id="rId4"/>
-    <p:sldId id="259" r:id="rId5"/>
-    <p:sldId id="260" r:id="rId6"/>
-    <p:sldId id="261" r:id="rId7"/>
-    <p:sldId id="262" r:id="rId8"/>
-    <p:sldId id="263" r:id="rId9"/>
-    <p:sldId id="264" r:id="rId10"/>
-    <p:sldId id="265" r:id="rId11"/>
+    <p:sldId id="283" r:id="rId4"/>
+    <p:sldId id="258" r:id="rId5"/>
+    <p:sldId id="259" r:id="rId6"/>
+    <p:sldId id="260" r:id="rId7"/>
+    <p:sldId id="261" r:id="rId8"/>
+    <p:sldId id="262" r:id="rId9"/>
+    <p:sldId id="263" r:id="rId10"/>
+    <p:sldId id="284" r:id="rId11"/>
+    <p:sldId id="264" r:id="rId12"/>
+    <p:sldId id="285" r:id="rId13"/>
+    <p:sldId id="286" r:id="rId14"/>
+    <p:sldId id="287" r:id="rId15"/>
+    <p:sldId id="265" r:id="rId16"/>
+    <p:sldId id="288" r:id="rId17"/>
+    <p:sldId id="267" r:id="rId18"/>
+    <p:sldId id="269" r:id="rId19"/>
+    <p:sldId id="270" r:id="rId20"/>
+    <p:sldId id="271" r:id="rId21"/>
+    <p:sldId id="275" r:id="rId22"/>
+    <p:sldId id="276" r:id="rId23"/>
+    <p:sldId id="277" r:id="rId24"/>
+    <p:sldId id="278" r:id="rId25"/>
+    <p:sldId id="279" r:id="rId26"/>
+    <p:sldId id="280" r:id="rId27"/>
+    <p:sldId id="281" r:id="rId28"/>
+    <p:sldId id="282" r:id="rId29"/>
+    <p:sldId id="266" r:id="rId30"/>
   </p:sldIdLst>
   <p:sldSz cx="12192000" cy="6858000"/>
   <p:notesSz cx="6858000" cy="9144000"/>
@@ -252,7 +271,7 @@
           <a:p>
             <a:fld id="{5B3AD1D6-AE87-C841-B3FD-7C9F7FCAE5AE}" type="datetimeFigureOut">
               <a:rPr lang="en-US" smtClean="0"/>
-              <a:t>11/21/19</a:t>
+              <a:t>12/2/19</a:t>
             </a:fld>
             <a:endParaRPr lang="en-US"/>
           </a:p>
@@ -422,7 +441,7 @@
           <a:p>
             <a:fld id="{5B3AD1D6-AE87-C841-B3FD-7C9F7FCAE5AE}" type="datetimeFigureOut">
               <a:rPr lang="en-US" smtClean="0"/>
-              <a:t>11/21/19</a:t>
+              <a:t>12/2/19</a:t>
             </a:fld>
             <a:endParaRPr lang="en-US"/>
           </a:p>
@@ -602,7 +621,7 @@
           <a:p>
             <a:fld id="{5B3AD1D6-AE87-C841-B3FD-7C9F7FCAE5AE}" type="datetimeFigureOut">
               <a:rPr lang="en-US" smtClean="0"/>
-              <a:t>11/21/19</a:t>
+              <a:t>12/2/19</a:t>
             </a:fld>
             <a:endParaRPr lang="en-US"/>
           </a:p>
@@ -772,7 +791,7 @@
           <a:p>
             <a:fld id="{5B3AD1D6-AE87-C841-B3FD-7C9F7FCAE5AE}" type="datetimeFigureOut">
               <a:rPr lang="en-US" smtClean="0"/>
-              <a:t>11/21/19</a:t>
+              <a:t>12/2/19</a:t>
             </a:fld>
             <a:endParaRPr lang="en-US"/>
           </a:p>
@@ -1018,7 +1037,7 @@
           <a:p>
             <a:fld id="{5B3AD1D6-AE87-C841-B3FD-7C9F7FCAE5AE}" type="datetimeFigureOut">
               <a:rPr lang="en-US" smtClean="0"/>
-              <a:t>11/21/19</a:t>
+              <a:t>12/2/19</a:t>
             </a:fld>
             <a:endParaRPr lang="en-US"/>
           </a:p>
@@ -1250,7 +1269,7 @@
           <a:p>
             <a:fld id="{5B3AD1D6-AE87-C841-B3FD-7C9F7FCAE5AE}" type="datetimeFigureOut">
               <a:rPr lang="en-US" smtClean="0"/>
-              <a:t>11/21/19</a:t>
+              <a:t>12/2/19</a:t>
             </a:fld>
             <a:endParaRPr lang="en-US"/>
           </a:p>
@@ -1617,7 +1636,7 @@
           <a:p>
             <a:fld id="{5B3AD1D6-AE87-C841-B3FD-7C9F7FCAE5AE}" type="datetimeFigureOut">
               <a:rPr lang="en-US" smtClean="0"/>
-              <a:t>11/21/19</a:t>
+              <a:t>12/2/19</a:t>
             </a:fld>
             <a:endParaRPr lang="en-US"/>
           </a:p>
@@ -1735,7 +1754,7 @@
           <a:p>
             <a:fld id="{5B3AD1D6-AE87-C841-B3FD-7C9F7FCAE5AE}" type="datetimeFigureOut">
               <a:rPr lang="en-US" smtClean="0"/>
-              <a:t>11/21/19</a:t>
+              <a:t>12/2/19</a:t>
             </a:fld>
             <a:endParaRPr lang="en-US"/>
           </a:p>
@@ -1830,7 +1849,7 @@
           <a:p>
             <a:fld id="{5B3AD1D6-AE87-C841-B3FD-7C9F7FCAE5AE}" type="datetimeFigureOut">
               <a:rPr lang="en-US" smtClean="0"/>
-              <a:t>11/21/19</a:t>
+              <a:t>12/2/19</a:t>
             </a:fld>
             <a:endParaRPr lang="en-US"/>
           </a:p>
@@ -2107,7 +2126,7 @@
           <a:p>
             <a:fld id="{5B3AD1D6-AE87-C841-B3FD-7C9F7FCAE5AE}" type="datetimeFigureOut">
               <a:rPr lang="en-US" smtClean="0"/>
-              <a:t>11/21/19</a:t>
+              <a:t>12/2/19</a:t>
             </a:fld>
             <a:endParaRPr lang="en-US"/>
           </a:p>
@@ -2360,7 +2379,7 @@
           <a:p>
             <a:fld id="{5B3AD1D6-AE87-C841-B3FD-7C9F7FCAE5AE}" type="datetimeFigureOut">
               <a:rPr lang="en-US" smtClean="0"/>
-              <a:t>11/21/19</a:t>
+              <a:t>12/2/19</a:t>
             </a:fld>
             <a:endParaRPr lang="en-US"/>
           </a:p>
@@ -2573,7 +2592,7 @@
           <a:p>
             <a:fld id="{5B3AD1D6-AE87-C841-B3FD-7C9F7FCAE5AE}" type="datetimeFigureOut">
               <a:rPr lang="en-US" smtClean="0"/>
-              <a:t>11/21/19</a:t>
+              <a:t>12/2/19</a:t>
             </a:fld>
             <a:endParaRPr lang="en-US"/>
           </a:p>
@@ -3285,6 +3304,403 @@
           <a:chExt cx="0" cy="0"/>
         </a:xfrm>
       </p:grpSpPr>
+      <p:sp>
+        <p:nvSpPr>
+          <p:cNvPr id="2" name="Title 1"/>
+          <p:cNvSpPr>
+            <a:spLocks noGrp="1"/>
+          </p:cNvSpPr>
+          <p:nvPr>
+            <p:ph type="ctrTitle"/>
+          </p:nvPr>
+        </p:nvSpPr>
+        <p:spPr/>
+        <p:txBody>
+          <a:bodyPr>
+            <a:normAutofit fontScale="90000"/>
+          </a:bodyPr>
+          <a:lstStyle/>
+          <a:p>
+            <a:r>
+              <a:rPr lang="en-US" sz="4000" dirty="0" smtClean="0">
+                <a:latin typeface="Arial Black" charset="0"/>
+                <a:ea typeface="Arial Black" charset="0"/>
+                <a:cs typeface="Arial Black" charset="0"/>
+              </a:rPr>
+              <a:t/>
+            </a:r>
+            <a:br>
+              <a:rPr lang="en-US" sz="4000" dirty="0" smtClean="0">
+                <a:latin typeface="Arial Black" charset="0"/>
+                <a:ea typeface="Arial Black" charset="0"/>
+                <a:cs typeface="Arial Black" charset="0"/>
+              </a:rPr>
+            </a:br>
+            <a:r>
+              <a:rPr lang="en-US" sz="4000" dirty="0">
+                <a:latin typeface="Arial Black" charset="0"/>
+                <a:ea typeface="Arial Black" charset="0"/>
+                <a:cs typeface="Arial Black" charset="0"/>
+              </a:rPr>
+              <a:t/>
+            </a:r>
+            <a:br>
+              <a:rPr lang="en-US" sz="4000" dirty="0">
+                <a:latin typeface="Arial Black" charset="0"/>
+                <a:ea typeface="Arial Black" charset="0"/>
+                <a:cs typeface="Arial Black" charset="0"/>
+              </a:rPr>
+            </a:br>
+            <a:r>
+              <a:rPr lang="en-US" sz="4000" dirty="0" smtClean="0">
+                <a:latin typeface="Arial Black" charset="0"/>
+                <a:ea typeface="Arial Black" charset="0"/>
+                <a:cs typeface="Arial Black" charset="0"/>
+              </a:rPr>
+              <a:t/>
+            </a:r>
+            <a:br>
+              <a:rPr lang="en-US" sz="4000" dirty="0" smtClean="0">
+                <a:latin typeface="Arial Black" charset="0"/>
+                <a:ea typeface="Arial Black" charset="0"/>
+                <a:cs typeface="Arial Black" charset="0"/>
+              </a:rPr>
+            </a:br>
+            <a:r>
+              <a:rPr lang="en-US" sz="4000" dirty="0">
+                <a:latin typeface="Arial Black" charset="0"/>
+                <a:ea typeface="Arial Black" charset="0"/>
+                <a:cs typeface="Arial Black" charset="0"/>
+              </a:rPr>
+              <a:t/>
+            </a:r>
+            <a:br>
+              <a:rPr lang="en-US" sz="4000" dirty="0">
+                <a:latin typeface="Arial Black" charset="0"/>
+                <a:ea typeface="Arial Black" charset="0"/>
+                <a:cs typeface="Arial Black" charset="0"/>
+              </a:rPr>
+            </a:br>
+            <a:r>
+              <a:rPr lang="en-US" sz="4000" dirty="0" smtClean="0">
+                <a:latin typeface="Arial Black" charset="0"/>
+                <a:ea typeface="Arial Black" charset="0"/>
+                <a:cs typeface="Arial Black" charset="0"/>
+              </a:rPr>
+              <a:t/>
+            </a:r>
+            <a:br>
+              <a:rPr lang="en-US" sz="4000" dirty="0" smtClean="0">
+                <a:latin typeface="Arial Black" charset="0"/>
+                <a:ea typeface="Arial Black" charset="0"/>
+                <a:cs typeface="Arial Black" charset="0"/>
+              </a:rPr>
+            </a:br>
+            <a:r>
+              <a:rPr lang="en-US" sz="4000" dirty="0">
+                <a:latin typeface="Arial Black" charset="0"/>
+                <a:ea typeface="Arial Black" charset="0"/>
+                <a:cs typeface="Arial Black" charset="0"/>
+              </a:rPr>
+              <a:t/>
+            </a:r>
+            <a:br>
+              <a:rPr lang="en-US" sz="4000" dirty="0">
+                <a:latin typeface="Arial Black" charset="0"/>
+                <a:ea typeface="Arial Black" charset="0"/>
+                <a:cs typeface="Arial Black" charset="0"/>
+              </a:rPr>
+            </a:br>
+            <a:r>
+              <a:rPr lang="en-US" sz="4000" dirty="0" smtClean="0">
+                <a:latin typeface="Arial Black" charset="0"/>
+                <a:ea typeface="Arial Black" charset="0"/>
+                <a:cs typeface="Arial Black" charset="0"/>
+              </a:rPr>
+              <a:t/>
+            </a:r>
+            <a:br>
+              <a:rPr lang="en-US" sz="4000" dirty="0" smtClean="0">
+                <a:latin typeface="Arial Black" charset="0"/>
+                <a:ea typeface="Arial Black" charset="0"/>
+                <a:cs typeface="Arial Black" charset="0"/>
+              </a:rPr>
+            </a:br>
+            <a:r>
+              <a:rPr lang="en-US" sz="4000" dirty="0">
+                <a:latin typeface="Arial Black" charset="0"/>
+                <a:ea typeface="Arial Black" charset="0"/>
+                <a:cs typeface="Arial Black" charset="0"/>
+              </a:rPr>
+              <a:t/>
+            </a:r>
+            <a:br>
+              <a:rPr lang="en-US" sz="4000" dirty="0">
+                <a:latin typeface="Arial Black" charset="0"/>
+                <a:ea typeface="Arial Black" charset="0"/>
+                <a:cs typeface="Arial Black" charset="0"/>
+              </a:rPr>
+            </a:br>
+            <a:r>
+              <a:rPr lang="en-US" sz="4000" dirty="0" smtClean="0">
+                <a:latin typeface="Arial Black" charset="0"/>
+                <a:ea typeface="Arial Black" charset="0"/>
+                <a:cs typeface="Arial Black" charset="0"/>
+              </a:rPr>
+              <a:t/>
+            </a:r>
+            <a:br>
+              <a:rPr lang="en-US" sz="4000" dirty="0" smtClean="0">
+                <a:latin typeface="Arial Black" charset="0"/>
+                <a:ea typeface="Arial Black" charset="0"/>
+                <a:cs typeface="Arial Black" charset="0"/>
+              </a:rPr>
+            </a:br>
+            <a:r>
+              <a:rPr lang="en-US" sz="4000" dirty="0">
+                <a:latin typeface="Arial Black" charset="0"/>
+                <a:ea typeface="Arial Black" charset="0"/>
+                <a:cs typeface="Arial Black" charset="0"/>
+              </a:rPr>
+              <a:t/>
+            </a:r>
+            <a:br>
+              <a:rPr lang="en-US" sz="4000" dirty="0">
+                <a:latin typeface="Arial Black" charset="0"/>
+                <a:ea typeface="Arial Black" charset="0"/>
+                <a:cs typeface="Arial Black" charset="0"/>
+              </a:rPr>
+            </a:br>
+            <a:r>
+              <a:rPr lang="en-US" sz="4000" dirty="0" smtClean="0">
+                <a:latin typeface="Arial Black" charset="0"/>
+                <a:ea typeface="Arial Black" charset="0"/>
+                <a:cs typeface="Arial Black" charset="0"/>
+              </a:rPr>
+              <a:t/>
+            </a:r>
+            <a:br>
+              <a:rPr lang="en-US" sz="4000" dirty="0" smtClean="0">
+                <a:latin typeface="Arial Black" charset="0"/>
+                <a:ea typeface="Arial Black" charset="0"/>
+                <a:cs typeface="Arial Black" charset="0"/>
+              </a:rPr>
+            </a:br>
+            <a:r>
+              <a:rPr lang="en-US" sz="4400" dirty="0" smtClean="0">
+                <a:latin typeface="Arial Black" charset="0"/>
+                <a:ea typeface="Arial Black" charset="0"/>
+                <a:cs typeface="Arial Black" charset="0"/>
+              </a:rPr>
+              <a:t/>
+            </a:r>
+            <a:br>
+              <a:rPr lang="en-US" sz="4400" dirty="0" smtClean="0">
+                <a:latin typeface="Arial Black" charset="0"/>
+                <a:ea typeface="Arial Black" charset="0"/>
+                <a:cs typeface="Arial Black" charset="0"/>
+              </a:rPr>
+            </a:br>
+            <a:r>
+              <a:rPr lang="en-US" sz="6700" dirty="0">
+                <a:latin typeface="Arial Black" charset="0"/>
+                <a:ea typeface="Arial Black" charset="0"/>
+                <a:cs typeface="Arial Black" charset="0"/>
+              </a:rPr>
+              <a:t> </a:t>
+            </a:r>
+            <a:r>
+              <a:rPr lang="en-US" sz="6700" dirty="0" smtClean="0">
+                <a:latin typeface="Arial Black" charset="0"/>
+                <a:ea typeface="Arial Black" charset="0"/>
+                <a:cs typeface="Arial Black" charset="0"/>
+              </a:rPr>
+              <a:t>Linear Regression</a:t>
+            </a:r>
+            <a:br>
+              <a:rPr lang="en-US" sz="6700" dirty="0" smtClean="0">
+                <a:latin typeface="Arial Black" charset="0"/>
+                <a:ea typeface="Arial Black" charset="0"/>
+                <a:cs typeface="Arial Black" charset="0"/>
+              </a:rPr>
+            </a:br>
+            <a:r>
+              <a:rPr lang="en-US" sz="6700" dirty="0" smtClean="0">
+                <a:latin typeface="Arial Black" charset="0"/>
+                <a:ea typeface="Arial Black" charset="0"/>
+                <a:cs typeface="Arial Black" charset="0"/>
+              </a:rPr>
+              <a:t>with</a:t>
+            </a:r>
+            <a:br>
+              <a:rPr lang="en-US" sz="6700" dirty="0" smtClean="0">
+                <a:latin typeface="Arial Black" charset="0"/>
+                <a:ea typeface="Arial Black" charset="0"/>
+                <a:cs typeface="Arial Black" charset="0"/>
+              </a:rPr>
+            </a:br>
+            <a:r>
+              <a:rPr lang="en-US" sz="6700" dirty="0" smtClean="0">
+                <a:latin typeface="Arial Black" charset="0"/>
+                <a:ea typeface="Arial Black" charset="0"/>
+                <a:cs typeface="Arial Black" charset="0"/>
+              </a:rPr>
+              <a:t>R Style Package</a:t>
+            </a:r>
+            <a:endParaRPr lang="en-US" dirty="0"/>
+          </a:p>
+        </p:txBody>
+      </p:sp>
+      <p:pic>
+        <p:nvPicPr>
+          <p:cNvPr id="3" name="Picture 2"/>
+          <p:cNvPicPr>
+            <a:picLocks noChangeAspect="1"/>
+          </p:cNvPicPr>
+          <p:nvPr/>
+        </p:nvPicPr>
+        <p:blipFill>
+          <a:blip r:embed="rId2">
+            <a:extLst>
+              <a:ext uri="{28A0092B-C50C-407E-A947-70E740481C1C}">
+                <a14:useLocalDpi xmlns:a14="http://schemas.microsoft.com/office/drawing/2010/main" val="0"/>
+              </a:ext>
+            </a:extLst>
+          </a:blip>
+          <a:stretch>
+            <a:fillRect/>
+          </a:stretch>
+        </p:blipFill>
+        <p:spPr>
+          <a:xfrm>
+            <a:off x="2908300" y="5773790"/>
+            <a:ext cx="6375400" cy="393700"/>
+          </a:xfrm>
+          <a:prstGeom prst="rect">
+            <a:avLst/>
+          </a:prstGeom>
+        </p:spPr>
+      </p:pic>
+      <p:pic>
+        <p:nvPicPr>
+          <p:cNvPr id="4" name="Picture 3"/>
+          <p:cNvPicPr>
+            <a:picLocks noChangeAspect="1"/>
+          </p:cNvPicPr>
+          <p:nvPr/>
+        </p:nvPicPr>
+        <p:blipFill>
+          <a:blip r:embed="rId3">
+            <a:extLst>
+              <a:ext uri="{28A0092B-C50C-407E-A947-70E740481C1C}">
+                <a14:useLocalDpi xmlns:a14="http://schemas.microsoft.com/office/drawing/2010/main" val="0"/>
+              </a:ext>
+            </a:extLst>
+          </a:blip>
+          <a:stretch>
+            <a:fillRect/>
+          </a:stretch>
+        </p:blipFill>
+        <p:spPr>
+          <a:xfrm>
+            <a:off x="1441450" y="4076726"/>
+            <a:ext cx="9309100" cy="1130300"/>
+          </a:xfrm>
+          <a:prstGeom prst="rect">
+            <a:avLst/>
+          </a:prstGeom>
+        </p:spPr>
+      </p:pic>
+    </p:spTree>
+    <p:extLst>
+      <p:ext uri="{BB962C8B-B14F-4D97-AF65-F5344CB8AC3E}">
+        <p14:creationId xmlns:p14="http://schemas.microsoft.com/office/powerpoint/2010/main" val="1367553244"/>
+      </p:ext>
+    </p:extLst>
+  </p:cSld>
+  <p:clrMapOvr>
+    <a:masterClrMapping/>
+  </p:clrMapOvr>
+</p:sld>
+</file>
+
+<file path=ppt/slides/slide11.xml><?xml version="1.0" encoding="utf-8"?>
+<p:sld xmlns:a="http://schemas.openxmlformats.org/drawingml/2006/main" xmlns:r="http://schemas.openxmlformats.org/officeDocument/2006/relationships" xmlns:p="http://schemas.openxmlformats.org/presentationml/2006/main">
+  <p:cSld>
+    <p:spTree>
+      <p:nvGrpSpPr>
+        <p:cNvPr id="1" name=""/>
+        <p:cNvGrpSpPr/>
+        <p:nvPr/>
+      </p:nvGrpSpPr>
+      <p:grpSpPr>
+        <a:xfrm>
+          <a:off x="0" y="0"/>
+          <a:ext cx="0" cy="0"/>
+          <a:chOff x="0" y="0"/>
+          <a:chExt cx="0" cy="0"/>
+        </a:xfrm>
+      </p:grpSpPr>
+      <p:pic>
+        <p:nvPicPr>
+          <p:cNvPr id="2" name="Picture 1"/>
+          <p:cNvPicPr>
+            <a:picLocks noChangeAspect="1"/>
+          </p:cNvPicPr>
+          <p:nvPr/>
+        </p:nvPicPr>
+        <p:blipFill>
+          <a:blip r:embed="rId2">
+            <a:extLst>
+              <a:ext uri="{28A0092B-C50C-407E-A947-70E740481C1C}">
+                <a14:useLocalDpi xmlns:a14="http://schemas.microsoft.com/office/drawing/2010/main" val="0"/>
+              </a:ext>
+            </a:extLst>
+          </a:blip>
+          <a:stretch>
+            <a:fillRect/>
+          </a:stretch>
+        </p:blipFill>
+        <p:spPr>
+          <a:xfrm>
+            <a:off x="1028700" y="571500"/>
+            <a:ext cx="10121900" cy="5702300"/>
+          </a:xfrm>
+          <a:prstGeom prst="rect">
+            <a:avLst/>
+          </a:prstGeom>
+        </p:spPr>
+      </p:pic>
+    </p:spTree>
+    <p:extLst>
+      <p:ext uri="{BB962C8B-B14F-4D97-AF65-F5344CB8AC3E}">
+        <p14:creationId xmlns:p14="http://schemas.microsoft.com/office/powerpoint/2010/main" val="1961866488"/>
+      </p:ext>
+    </p:extLst>
+  </p:cSld>
+  <p:clrMapOvr>
+    <a:masterClrMapping/>
+  </p:clrMapOvr>
+</p:sld>
+</file>
+
+<file path=ppt/slides/slide12.xml><?xml version="1.0" encoding="utf-8"?>
+<p:sld xmlns:a="http://schemas.openxmlformats.org/drawingml/2006/main" xmlns:r="http://schemas.openxmlformats.org/officeDocument/2006/relationships" xmlns:p="http://schemas.openxmlformats.org/presentationml/2006/main">
+  <p:cSld>
+    <p:spTree>
+      <p:nvGrpSpPr>
+        <p:cNvPr id="1" name=""/>
+        <p:cNvGrpSpPr/>
+        <p:nvPr/>
+      </p:nvGrpSpPr>
+      <p:grpSpPr>
+        <a:xfrm>
+          <a:off x="0" y="0"/>
+          <a:ext cx="0" cy="0"/>
+          <a:chOff x="0" y="0"/>
+          <a:chExt cx="0" cy="0"/>
+        </a:xfrm>
+      </p:grpSpPr>
       <p:pic>
         <p:nvPicPr>
           <p:cNvPr id="4" name="Picture 3"/>
@@ -3307,6 +3723,186 @@
         </p:blipFill>
         <p:spPr>
           <a:xfrm>
+            <a:off x="620486" y="768914"/>
+            <a:ext cx="10813638" cy="5320171"/>
+          </a:xfrm>
+          <a:prstGeom prst="rect">
+            <a:avLst/>
+          </a:prstGeom>
+        </p:spPr>
+      </p:pic>
+    </p:spTree>
+    <p:extLst>
+      <p:ext uri="{BB962C8B-B14F-4D97-AF65-F5344CB8AC3E}">
+        <p14:creationId xmlns:p14="http://schemas.microsoft.com/office/powerpoint/2010/main" val="1099628366"/>
+      </p:ext>
+    </p:extLst>
+  </p:cSld>
+  <p:clrMapOvr>
+    <a:masterClrMapping/>
+  </p:clrMapOvr>
+</p:sld>
+</file>
+
+<file path=ppt/slides/slide13.xml><?xml version="1.0" encoding="utf-8"?>
+<p:sld xmlns:a="http://schemas.openxmlformats.org/drawingml/2006/main" xmlns:r="http://schemas.openxmlformats.org/officeDocument/2006/relationships" xmlns:p="http://schemas.openxmlformats.org/presentationml/2006/main">
+  <p:cSld>
+    <p:spTree>
+      <p:nvGrpSpPr>
+        <p:cNvPr id="1" name=""/>
+        <p:cNvGrpSpPr/>
+        <p:nvPr/>
+      </p:nvGrpSpPr>
+      <p:grpSpPr>
+        <a:xfrm>
+          <a:off x="0" y="0"/>
+          <a:ext cx="0" cy="0"/>
+          <a:chOff x="0" y="0"/>
+          <a:chExt cx="0" cy="0"/>
+        </a:xfrm>
+      </p:grpSpPr>
+      <p:pic>
+        <p:nvPicPr>
+          <p:cNvPr id="4" name="Picture 3"/>
+          <p:cNvPicPr>
+            <a:picLocks noChangeAspect="1"/>
+          </p:cNvPicPr>
+          <p:nvPr/>
+        </p:nvPicPr>
+        <p:blipFill>
+          <a:blip r:embed="rId2">
+            <a:extLst>
+              <a:ext uri="{28A0092B-C50C-407E-A947-70E740481C1C}">
+                <a14:useLocalDpi xmlns:a14="http://schemas.microsoft.com/office/drawing/2010/main" val="0"/>
+              </a:ext>
+            </a:extLst>
+          </a:blip>
+          <a:stretch>
+            <a:fillRect/>
+          </a:stretch>
+        </p:blipFill>
+        <p:spPr>
+          <a:xfrm>
+            <a:off x="620486" y="292858"/>
+            <a:ext cx="10813638" cy="6272282"/>
+          </a:xfrm>
+          <a:prstGeom prst="rect">
+            <a:avLst/>
+          </a:prstGeom>
+        </p:spPr>
+      </p:pic>
+    </p:spTree>
+    <p:extLst>
+      <p:ext uri="{BB962C8B-B14F-4D97-AF65-F5344CB8AC3E}">
+        <p14:creationId xmlns:p14="http://schemas.microsoft.com/office/powerpoint/2010/main" val="1272399629"/>
+      </p:ext>
+    </p:extLst>
+  </p:cSld>
+  <p:clrMapOvr>
+    <a:masterClrMapping/>
+  </p:clrMapOvr>
+</p:sld>
+</file>
+
+<file path=ppt/slides/slide14.xml><?xml version="1.0" encoding="utf-8"?>
+<p:sld xmlns:a="http://schemas.openxmlformats.org/drawingml/2006/main" xmlns:r="http://schemas.openxmlformats.org/officeDocument/2006/relationships" xmlns:p="http://schemas.openxmlformats.org/presentationml/2006/main">
+  <p:cSld>
+    <p:spTree>
+      <p:nvGrpSpPr>
+        <p:cNvPr id="1" name=""/>
+        <p:cNvGrpSpPr/>
+        <p:nvPr/>
+      </p:nvGrpSpPr>
+      <p:grpSpPr>
+        <a:xfrm>
+          <a:off x="0" y="0"/>
+          <a:ext cx="0" cy="0"/>
+          <a:chOff x="0" y="0"/>
+          <a:chExt cx="0" cy="0"/>
+        </a:xfrm>
+      </p:grpSpPr>
+      <p:pic>
+        <p:nvPicPr>
+          <p:cNvPr id="4" name="Picture 3"/>
+          <p:cNvPicPr>
+            <a:picLocks noChangeAspect="1"/>
+          </p:cNvPicPr>
+          <p:nvPr/>
+        </p:nvPicPr>
+        <p:blipFill>
+          <a:blip r:embed="rId2">
+            <a:extLst>
+              <a:ext uri="{28A0092B-C50C-407E-A947-70E740481C1C}">
+                <a14:useLocalDpi xmlns:a14="http://schemas.microsoft.com/office/drawing/2010/main" val="0"/>
+              </a:ext>
+            </a:extLst>
+          </a:blip>
+          <a:stretch>
+            <a:fillRect/>
+          </a:stretch>
+        </p:blipFill>
+        <p:spPr>
+          <a:xfrm>
+            <a:off x="620486" y="893449"/>
+            <a:ext cx="10813638" cy="5071101"/>
+          </a:xfrm>
+          <a:prstGeom prst="rect">
+            <a:avLst/>
+          </a:prstGeom>
+        </p:spPr>
+      </p:pic>
+    </p:spTree>
+    <p:extLst>
+      <p:ext uri="{BB962C8B-B14F-4D97-AF65-F5344CB8AC3E}">
+        <p14:creationId xmlns:p14="http://schemas.microsoft.com/office/powerpoint/2010/main" val="1238226813"/>
+      </p:ext>
+    </p:extLst>
+  </p:cSld>
+  <p:clrMapOvr>
+    <a:masterClrMapping/>
+  </p:clrMapOvr>
+</p:sld>
+</file>
+
+<file path=ppt/slides/slide15.xml><?xml version="1.0" encoding="utf-8"?>
+<p:sld xmlns:a="http://schemas.openxmlformats.org/drawingml/2006/main" xmlns:r="http://schemas.openxmlformats.org/officeDocument/2006/relationships" xmlns:p="http://schemas.openxmlformats.org/presentationml/2006/main">
+  <p:cSld>
+    <p:spTree>
+      <p:nvGrpSpPr>
+        <p:cNvPr id="1" name=""/>
+        <p:cNvGrpSpPr/>
+        <p:nvPr/>
+      </p:nvGrpSpPr>
+      <p:grpSpPr>
+        <a:xfrm>
+          <a:off x="0" y="0"/>
+          <a:ext cx="0" cy="0"/>
+          <a:chOff x="0" y="0"/>
+          <a:chExt cx="0" cy="0"/>
+        </a:xfrm>
+      </p:grpSpPr>
+      <p:pic>
+        <p:nvPicPr>
+          <p:cNvPr id="4" name="Picture 3"/>
+          <p:cNvPicPr>
+            <a:picLocks noChangeAspect="1"/>
+          </p:cNvPicPr>
+          <p:nvPr/>
+        </p:nvPicPr>
+        <p:blipFill>
+          <a:blip r:embed="rId2">
+            <a:extLst>
+              <a:ext uri="{28A0092B-C50C-407E-A947-70E740481C1C}">
+                <a14:useLocalDpi xmlns:a14="http://schemas.microsoft.com/office/drawing/2010/main" val="0"/>
+              </a:ext>
+            </a:extLst>
+          </a:blip>
+          <a:stretch>
+            <a:fillRect/>
+          </a:stretch>
+        </p:blipFill>
+        <p:spPr>
+          <a:xfrm>
             <a:off x="830228" y="0"/>
             <a:ext cx="10394154" cy="6857999"/>
           </a:xfrm>
@@ -3319,6 +3915,312 @@
     <p:extLst>
       <p:ext uri="{BB962C8B-B14F-4D97-AF65-F5344CB8AC3E}">
         <p14:creationId xmlns:p14="http://schemas.microsoft.com/office/powerpoint/2010/main" val="180107552"/>
+      </p:ext>
+    </p:extLst>
+  </p:cSld>
+  <p:clrMapOvr>
+    <a:masterClrMapping/>
+  </p:clrMapOvr>
+</p:sld>
+</file>
+
+<file path=ppt/slides/slide16.xml><?xml version="1.0" encoding="utf-8"?>
+<p:sld xmlns:a="http://schemas.openxmlformats.org/drawingml/2006/main" xmlns:r="http://schemas.openxmlformats.org/officeDocument/2006/relationships" xmlns:p="http://schemas.openxmlformats.org/presentationml/2006/main">
+  <p:cSld>
+    <p:spTree>
+      <p:nvGrpSpPr>
+        <p:cNvPr id="1" name=""/>
+        <p:cNvGrpSpPr/>
+        <p:nvPr/>
+      </p:nvGrpSpPr>
+      <p:grpSpPr>
+        <a:xfrm>
+          <a:off x="0" y="0"/>
+          <a:ext cx="0" cy="0"/>
+          <a:chOff x="0" y="0"/>
+          <a:chExt cx="0" cy="0"/>
+        </a:xfrm>
+      </p:grpSpPr>
+      <p:pic>
+        <p:nvPicPr>
+          <p:cNvPr id="4" name="Picture 3"/>
+          <p:cNvPicPr>
+            <a:picLocks noChangeAspect="1"/>
+          </p:cNvPicPr>
+          <p:nvPr/>
+        </p:nvPicPr>
+        <p:blipFill>
+          <a:blip r:embed="rId2">
+            <a:extLst>
+              <a:ext uri="{28A0092B-C50C-407E-A947-70E740481C1C}">
+                <a14:useLocalDpi xmlns:a14="http://schemas.microsoft.com/office/drawing/2010/main" val="0"/>
+              </a:ext>
+            </a:extLst>
+          </a:blip>
+          <a:stretch>
+            <a:fillRect/>
+          </a:stretch>
+        </p:blipFill>
+        <p:spPr>
+          <a:xfrm>
+            <a:off x="620486" y="769053"/>
+            <a:ext cx="10813638" cy="5319892"/>
+          </a:xfrm>
+          <a:prstGeom prst="rect">
+            <a:avLst/>
+          </a:prstGeom>
+        </p:spPr>
+      </p:pic>
+    </p:spTree>
+    <p:extLst>
+      <p:ext uri="{BB962C8B-B14F-4D97-AF65-F5344CB8AC3E}">
+        <p14:creationId xmlns:p14="http://schemas.microsoft.com/office/powerpoint/2010/main" val="1554815393"/>
+      </p:ext>
+    </p:extLst>
+  </p:cSld>
+  <p:clrMapOvr>
+    <a:masterClrMapping/>
+  </p:clrMapOvr>
+</p:sld>
+</file>
+
+<file path=ppt/slides/slide17.xml><?xml version="1.0" encoding="utf-8"?>
+<p:sld xmlns:a="http://schemas.openxmlformats.org/drawingml/2006/main" xmlns:r="http://schemas.openxmlformats.org/officeDocument/2006/relationships" xmlns:p="http://schemas.openxmlformats.org/presentationml/2006/main">
+  <p:cSld>
+    <p:spTree>
+      <p:nvGrpSpPr>
+        <p:cNvPr id="1" name=""/>
+        <p:cNvGrpSpPr/>
+        <p:nvPr/>
+      </p:nvGrpSpPr>
+      <p:grpSpPr>
+        <a:xfrm>
+          <a:off x="0" y="0"/>
+          <a:ext cx="0" cy="0"/>
+          <a:chOff x="0" y="0"/>
+          <a:chExt cx="0" cy="0"/>
+        </a:xfrm>
+      </p:grpSpPr>
+      <p:sp>
+        <p:nvSpPr>
+          <p:cNvPr id="2" name="Title 1"/>
+          <p:cNvSpPr>
+            <a:spLocks noGrp="1"/>
+          </p:cNvSpPr>
+          <p:nvPr>
+            <p:ph type="title"/>
+          </p:nvPr>
+        </p:nvSpPr>
+        <p:spPr/>
+        <p:txBody>
+          <a:bodyPr>
+            <a:normAutofit/>
+          </a:bodyPr>
+          <a:lstStyle/>
+          <a:p>
+            <a:r>
+              <a:rPr lang="en-US" sz="4000" dirty="0" smtClean="0">
+                <a:latin typeface="Arial Black" charset="0"/>
+                <a:ea typeface="Arial Black" charset="0"/>
+                <a:cs typeface="Arial Black" charset="0"/>
+              </a:rPr>
+              <a:t>Linear Regression in Matrix Form</a:t>
+            </a:r>
+            <a:endParaRPr lang="en-US" sz="4000" dirty="0">
+              <a:latin typeface="Arial Black" charset="0"/>
+              <a:ea typeface="Arial Black" charset="0"/>
+              <a:cs typeface="Arial Black" charset="0"/>
+            </a:endParaRPr>
+          </a:p>
+        </p:txBody>
+      </p:sp>
+      <p:pic>
+        <p:nvPicPr>
+          <p:cNvPr id="6" name="Picture 5"/>
+          <p:cNvPicPr>
+            <a:picLocks noChangeAspect="1"/>
+          </p:cNvPicPr>
+          <p:nvPr/>
+        </p:nvPicPr>
+        <p:blipFill>
+          <a:blip r:embed="rId2">
+            <a:extLst>
+              <a:ext uri="{28A0092B-C50C-407E-A947-70E740481C1C}">
+                <a14:useLocalDpi xmlns:a14="http://schemas.microsoft.com/office/drawing/2010/main" val="0"/>
+              </a:ext>
+            </a:extLst>
+          </a:blip>
+          <a:stretch>
+            <a:fillRect/>
+          </a:stretch>
+        </p:blipFill>
+        <p:spPr>
+          <a:xfrm>
+            <a:off x="2859640" y="1855074"/>
+            <a:ext cx="6078877" cy="4547580"/>
+          </a:xfrm>
+          <a:prstGeom prst="rect">
+            <a:avLst/>
+          </a:prstGeom>
+        </p:spPr>
+      </p:pic>
+    </p:spTree>
+    <p:extLst>
+      <p:ext uri="{BB962C8B-B14F-4D97-AF65-F5344CB8AC3E}">
+        <p14:creationId xmlns:p14="http://schemas.microsoft.com/office/powerpoint/2010/main" val="729088318"/>
+      </p:ext>
+    </p:extLst>
+  </p:cSld>
+  <p:clrMapOvr>
+    <a:masterClrMapping/>
+  </p:clrMapOvr>
+</p:sld>
+</file>
+
+<file path=ppt/slides/slide18.xml><?xml version="1.0" encoding="utf-8"?>
+<p:sld xmlns:a="http://schemas.openxmlformats.org/drawingml/2006/main" xmlns:r="http://schemas.openxmlformats.org/officeDocument/2006/relationships" xmlns:p="http://schemas.openxmlformats.org/presentationml/2006/main">
+  <p:cSld>
+    <p:spTree>
+      <p:nvGrpSpPr>
+        <p:cNvPr id="1" name=""/>
+        <p:cNvGrpSpPr/>
+        <p:nvPr/>
+      </p:nvGrpSpPr>
+      <p:grpSpPr>
+        <a:xfrm>
+          <a:off x="0" y="0"/>
+          <a:ext cx="0" cy="0"/>
+          <a:chOff x="0" y="0"/>
+          <a:chExt cx="0" cy="0"/>
+        </a:xfrm>
+      </p:grpSpPr>
+      <p:sp>
+        <p:nvSpPr>
+          <p:cNvPr id="2" name="Title 1"/>
+          <p:cNvSpPr>
+            <a:spLocks noGrp="1"/>
+          </p:cNvSpPr>
+          <p:nvPr>
+            <p:ph type="title"/>
+          </p:nvPr>
+        </p:nvSpPr>
+        <p:spPr/>
+        <p:txBody>
+          <a:bodyPr>
+            <a:normAutofit/>
+          </a:bodyPr>
+          <a:lstStyle/>
+          <a:p>
+            <a:r>
+              <a:rPr lang="en-US" sz="4000" dirty="0" smtClean="0">
+                <a:latin typeface="Arial Black" charset="0"/>
+                <a:ea typeface="Arial Black" charset="0"/>
+                <a:cs typeface="Arial Black" charset="0"/>
+              </a:rPr>
+              <a:t>Linear Regression in Matrix Form</a:t>
+            </a:r>
+            <a:endParaRPr lang="en-US" sz="4000" dirty="0">
+              <a:latin typeface="Arial Black" charset="0"/>
+              <a:ea typeface="Arial Black" charset="0"/>
+              <a:cs typeface="Arial Black" charset="0"/>
+            </a:endParaRPr>
+          </a:p>
+        </p:txBody>
+      </p:sp>
+      <p:pic>
+        <p:nvPicPr>
+          <p:cNvPr id="5" name="Picture 4"/>
+          <p:cNvPicPr>
+            <a:picLocks noChangeAspect="1"/>
+          </p:cNvPicPr>
+          <p:nvPr/>
+        </p:nvPicPr>
+        <p:blipFill>
+          <a:blip r:embed="rId2">
+            <a:extLst>
+              <a:ext uri="{28A0092B-C50C-407E-A947-70E740481C1C}">
+                <a14:useLocalDpi xmlns:a14="http://schemas.microsoft.com/office/drawing/2010/main" val="0"/>
+              </a:ext>
+            </a:extLst>
+          </a:blip>
+          <a:stretch>
+            <a:fillRect/>
+          </a:stretch>
+        </p:blipFill>
+        <p:spPr>
+          <a:xfrm>
+            <a:off x="1466850" y="2202665"/>
+            <a:ext cx="9258300" cy="3898900"/>
+          </a:xfrm>
+          <a:prstGeom prst="rect">
+            <a:avLst/>
+          </a:prstGeom>
+        </p:spPr>
+      </p:pic>
+    </p:spTree>
+    <p:extLst>
+      <p:ext uri="{BB962C8B-B14F-4D97-AF65-F5344CB8AC3E}">
+        <p14:creationId xmlns:p14="http://schemas.microsoft.com/office/powerpoint/2010/main" val="652686642"/>
+      </p:ext>
+    </p:extLst>
+  </p:cSld>
+  <p:clrMapOvr>
+    <a:masterClrMapping/>
+  </p:clrMapOvr>
+</p:sld>
+</file>
+
+<file path=ppt/slides/slide19.xml><?xml version="1.0" encoding="utf-8"?>
+<p:sld xmlns:a="http://schemas.openxmlformats.org/drawingml/2006/main" xmlns:r="http://schemas.openxmlformats.org/officeDocument/2006/relationships" xmlns:p="http://schemas.openxmlformats.org/presentationml/2006/main">
+  <p:cSld>
+    <p:spTree>
+      <p:nvGrpSpPr>
+        <p:cNvPr id="1" name=""/>
+        <p:cNvGrpSpPr/>
+        <p:nvPr/>
+      </p:nvGrpSpPr>
+      <p:grpSpPr>
+        <a:xfrm>
+          <a:off x="0" y="0"/>
+          <a:ext cx="0" cy="0"/>
+          <a:chOff x="0" y="0"/>
+          <a:chExt cx="0" cy="0"/>
+        </a:xfrm>
+      </p:grpSpPr>
+      <p:pic>
+        <p:nvPicPr>
+          <p:cNvPr id="2" name="Picture 1"/>
+          <p:cNvPicPr>
+            <a:picLocks noChangeAspect="1"/>
+          </p:cNvPicPr>
+          <p:nvPr/>
+        </p:nvPicPr>
+        <p:blipFill>
+          <a:blip r:embed="rId2">
+            <a:extLst>
+              <a:ext uri="{28A0092B-C50C-407E-A947-70E740481C1C}">
+                <a14:useLocalDpi xmlns:a14="http://schemas.microsoft.com/office/drawing/2010/main" val="0"/>
+              </a:ext>
+            </a:extLst>
+          </a:blip>
+          <a:stretch>
+            <a:fillRect/>
+          </a:stretch>
+        </p:blipFill>
+        <p:spPr>
+          <a:xfrm>
+            <a:off x="934948" y="1452081"/>
+            <a:ext cx="10350500" cy="3797300"/>
+          </a:xfrm>
+          <a:prstGeom prst="rect">
+            <a:avLst/>
+          </a:prstGeom>
+        </p:spPr>
+      </p:pic>
+    </p:spTree>
+    <p:extLst>
+      <p:ext uri="{BB962C8B-B14F-4D97-AF65-F5344CB8AC3E}">
+        <p14:creationId xmlns:p14="http://schemas.microsoft.com/office/powerpoint/2010/main" val="2127575303"/>
       </p:ext>
     </p:extLst>
   </p:cSld>
@@ -3388,7 +4290,7 @@
 </p:sld>
 </file>
 
-<file path=ppt/slides/slide3.xml><?xml version="1.0" encoding="utf-8"?>
+<file path=ppt/slides/slide20.xml><?xml version="1.0" encoding="utf-8"?>
 <p:sld xmlns:a="http://schemas.openxmlformats.org/drawingml/2006/main" xmlns:r="http://schemas.openxmlformats.org/officeDocument/2006/relationships" xmlns:p="http://schemas.openxmlformats.org/presentationml/2006/main">
   <p:cSld>
     <p:spTree>
@@ -3407,7 +4309,7 @@
       </p:grpSpPr>
       <p:pic>
         <p:nvPicPr>
-          <p:cNvPr id="4" name="Picture 3"/>
+          <p:cNvPr id="2" name="Picture 1"/>
           <p:cNvPicPr>
             <a:picLocks noChangeAspect="1"/>
           </p:cNvPicPr>
@@ -3427,8 +4329,78 @@
         </p:blipFill>
         <p:spPr>
           <a:xfrm>
-            <a:off x="620486" y="1035674"/>
-            <a:ext cx="10813638" cy="4786650"/>
+            <a:off x="0" y="0"/>
+            <a:ext cx="12051587" cy="6857999"/>
+          </a:xfrm>
+          <a:prstGeom prst="rect">
+            <a:avLst/>
+          </a:prstGeom>
+        </p:spPr>
+      </p:pic>
+      <p:sp>
+        <p:nvSpPr>
+          <p:cNvPr id="3" name="Down Arrow 2"/>
+          <p:cNvSpPr/>
+          <p:nvPr/>
+        </p:nvSpPr>
+        <p:spPr>
+          <a:xfrm rot="3386723">
+            <a:off x="585251" y="1660224"/>
+            <a:ext cx="484632" cy="978408"/>
+          </a:xfrm>
+          <a:prstGeom prst="downArrow">
+            <a:avLst/>
+          </a:prstGeom>
+        </p:spPr>
+        <p:style>
+          <a:lnRef idx="2">
+            <a:schemeClr val="accent1">
+              <a:shade val="50000"/>
+            </a:schemeClr>
+          </a:lnRef>
+          <a:fillRef idx="1">
+            <a:schemeClr val="accent1"/>
+          </a:fillRef>
+          <a:effectRef idx="0">
+            <a:schemeClr val="accent1"/>
+          </a:effectRef>
+          <a:fontRef idx="minor">
+            <a:schemeClr val="lt1"/>
+          </a:fontRef>
+        </p:style>
+        <p:txBody>
+          <a:bodyPr rtlCol="0" anchor="ctr"/>
+          <a:lstStyle/>
+          <a:p>
+            <a:pPr algn="ctr"/>
+            <a:endParaRPr lang="en-US"/>
+          </a:p>
+        </p:txBody>
+      </p:sp>
+      <p:pic>
+        <p:nvPicPr>
+          <p:cNvPr id="4" name="Picture 3"/>
+          <p:cNvPicPr>
+            <a:picLocks noChangeAspect="1"/>
+          </p:cNvPicPr>
+          <p:nvPr/>
+        </p:nvPicPr>
+        <p:blipFill>
+          <a:blip r:embed="rId3">
+            <a:extLst>
+              <a:ext uri="{28A0092B-C50C-407E-A947-70E740481C1C}">
+                <a14:useLocalDpi xmlns:a14="http://schemas.microsoft.com/office/drawing/2010/main" val="0"/>
+              </a:ext>
+            </a:extLst>
+          </a:blip>
+          <a:stretch>
+            <a:fillRect/>
+          </a:stretch>
+        </p:blipFill>
+        <p:spPr>
+          <a:xfrm>
+            <a:off x="1533352" y="176341"/>
+            <a:ext cx="5177034" cy="2075380"/>
           </a:xfrm>
           <a:prstGeom prst="rect">
             <a:avLst/>
@@ -3438,7 +4410,1402 @@
     </p:spTree>
     <p:extLst>
       <p:ext uri="{BB962C8B-B14F-4D97-AF65-F5344CB8AC3E}">
-        <p14:creationId xmlns:p14="http://schemas.microsoft.com/office/powerpoint/2010/main" val="352263541"/>
+        <p14:creationId xmlns:p14="http://schemas.microsoft.com/office/powerpoint/2010/main" val="1588318530"/>
+      </p:ext>
+    </p:extLst>
+  </p:cSld>
+  <p:clrMapOvr>
+    <a:masterClrMapping/>
+  </p:clrMapOvr>
+</p:sld>
+</file>
+
+<file path=ppt/slides/slide21.xml><?xml version="1.0" encoding="utf-8"?>
+<p:sld xmlns:a="http://schemas.openxmlformats.org/drawingml/2006/main" xmlns:r="http://schemas.openxmlformats.org/officeDocument/2006/relationships" xmlns:p="http://schemas.openxmlformats.org/presentationml/2006/main">
+  <p:cSld>
+    <p:spTree>
+      <p:nvGrpSpPr>
+        <p:cNvPr id="1" name=""/>
+        <p:cNvGrpSpPr/>
+        <p:nvPr/>
+      </p:nvGrpSpPr>
+      <p:grpSpPr>
+        <a:xfrm>
+          <a:off x="0" y="0"/>
+          <a:ext cx="0" cy="0"/>
+          <a:chOff x="0" y="0"/>
+          <a:chExt cx="0" cy="0"/>
+        </a:xfrm>
+      </p:grpSpPr>
+      <p:pic>
+        <p:nvPicPr>
+          <p:cNvPr id="2" name="Picture 1"/>
+          <p:cNvPicPr>
+            <a:picLocks noChangeAspect="1"/>
+          </p:cNvPicPr>
+          <p:nvPr/>
+        </p:nvPicPr>
+        <p:blipFill>
+          <a:blip r:embed="rId2">
+            <a:extLst>
+              <a:ext uri="{28A0092B-C50C-407E-A947-70E740481C1C}">
+                <a14:useLocalDpi xmlns:a14="http://schemas.microsoft.com/office/drawing/2010/main" val="0"/>
+              </a:ext>
+            </a:extLst>
+          </a:blip>
+          <a:stretch>
+            <a:fillRect/>
+          </a:stretch>
+        </p:blipFill>
+        <p:spPr>
+          <a:xfrm>
+            <a:off x="0" y="0"/>
+            <a:ext cx="12051587" cy="6857999"/>
+          </a:xfrm>
+          <a:prstGeom prst="rect">
+            <a:avLst/>
+          </a:prstGeom>
+        </p:spPr>
+      </p:pic>
+      <p:sp>
+        <p:nvSpPr>
+          <p:cNvPr id="3" name="Down Arrow 2"/>
+          <p:cNvSpPr/>
+          <p:nvPr/>
+        </p:nvSpPr>
+        <p:spPr>
+          <a:xfrm rot="3386723">
+            <a:off x="1541125" y="1931539"/>
+            <a:ext cx="484632" cy="978408"/>
+          </a:xfrm>
+          <a:prstGeom prst="downArrow">
+            <a:avLst/>
+          </a:prstGeom>
+        </p:spPr>
+        <p:style>
+          <a:lnRef idx="2">
+            <a:schemeClr val="accent1">
+              <a:shade val="50000"/>
+            </a:schemeClr>
+          </a:lnRef>
+          <a:fillRef idx="1">
+            <a:schemeClr val="accent1"/>
+          </a:fillRef>
+          <a:effectRef idx="0">
+            <a:schemeClr val="accent1"/>
+          </a:effectRef>
+          <a:fontRef idx="minor">
+            <a:schemeClr val="lt1"/>
+          </a:fontRef>
+        </p:style>
+        <p:txBody>
+          <a:bodyPr rtlCol="0" anchor="ctr"/>
+          <a:lstStyle/>
+          <a:p>
+            <a:pPr algn="ctr"/>
+            <a:endParaRPr lang="en-US"/>
+          </a:p>
+        </p:txBody>
+      </p:sp>
+      <p:pic>
+        <p:nvPicPr>
+          <p:cNvPr id="4" name="Picture 3"/>
+          <p:cNvPicPr>
+            <a:picLocks noChangeAspect="1"/>
+          </p:cNvPicPr>
+          <p:nvPr/>
+        </p:nvPicPr>
+        <p:blipFill>
+          <a:blip r:embed="rId3">
+            <a:extLst>
+              <a:ext uri="{28A0092B-C50C-407E-A947-70E740481C1C}">
+                <a14:useLocalDpi xmlns:a14="http://schemas.microsoft.com/office/drawing/2010/main" val="0"/>
+              </a:ext>
+            </a:extLst>
+          </a:blip>
+          <a:stretch>
+            <a:fillRect/>
+          </a:stretch>
+        </p:blipFill>
+        <p:spPr>
+          <a:xfrm>
+            <a:off x="2325060" y="1811000"/>
+            <a:ext cx="3305178" cy="825500"/>
+          </a:xfrm>
+          <a:prstGeom prst="rect">
+            <a:avLst/>
+          </a:prstGeom>
+        </p:spPr>
+      </p:pic>
+    </p:spTree>
+    <p:extLst>
+      <p:ext uri="{BB962C8B-B14F-4D97-AF65-F5344CB8AC3E}">
+        <p14:creationId xmlns:p14="http://schemas.microsoft.com/office/powerpoint/2010/main" val="1842066703"/>
+      </p:ext>
+    </p:extLst>
+  </p:cSld>
+  <p:clrMapOvr>
+    <a:masterClrMapping/>
+  </p:clrMapOvr>
+</p:sld>
+</file>
+
+<file path=ppt/slides/slide22.xml><?xml version="1.0" encoding="utf-8"?>
+<p:sld xmlns:a="http://schemas.openxmlformats.org/drawingml/2006/main" xmlns:r="http://schemas.openxmlformats.org/officeDocument/2006/relationships" xmlns:p="http://schemas.openxmlformats.org/presentationml/2006/main">
+  <p:cSld>
+    <p:spTree>
+      <p:nvGrpSpPr>
+        <p:cNvPr id="1" name=""/>
+        <p:cNvGrpSpPr/>
+        <p:nvPr/>
+      </p:nvGrpSpPr>
+      <p:grpSpPr>
+        <a:xfrm>
+          <a:off x="0" y="0"/>
+          <a:ext cx="0" cy="0"/>
+          <a:chOff x="0" y="0"/>
+          <a:chExt cx="0" cy="0"/>
+        </a:xfrm>
+      </p:grpSpPr>
+      <p:pic>
+        <p:nvPicPr>
+          <p:cNvPr id="2" name="Picture 1"/>
+          <p:cNvPicPr>
+            <a:picLocks noChangeAspect="1"/>
+          </p:cNvPicPr>
+          <p:nvPr/>
+        </p:nvPicPr>
+        <p:blipFill>
+          <a:blip r:embed="rId2">
+            <a:extLst>
+              <a:ext uri="{28A0092B-C50C-407E-A947-70E740481C1C}">
+                <a14:useLocalDpi xmlns:a14="http://schemas.microsoft.com/office/drawing/2010/main" val="0"/>
+              </a:ext>
+            </a:extLst>
+          </a:blip>
+          <a:stretch>
+            <a:fillRect/>
+          </a:stretch>
+        </p:blipFill>
+        <p:spPr>
+          <a:xfrm>
+            <a:off x="0" y="0"/>
+            <a:ext cx="12051587" cy="6857999"/>
+          </a:xfrm>
+          <a:prstGeom prst="rect">
+            <a:avLst/>
+          </a:prstGeom>
+        </p:spPr>
+      </p:pic>
+      <p:sp>
+        <p:nvSpPr>
+          <p:cNvPr id="3" name="Down Arrow 2"/>
+          <p:cNvSpPr/>
+          <p:nvPr/>
+        </p:nvSpPr>
+        <p:spPr>
+          <a:xfrm rot="3386723">
+            <a:off x="1273997" y="2332232"/>
+            <a:ext cx="484632" cy="978408"/>
+          </a:xfrm>
+          <a:prstGeom prst="downArrow">
+            <a:avLst/>
+          </a:prstGeom>
+        </p:spPr>
+        <p:style>
+          <a:lnRef idx="2">
+            <a:schemeClr val="accent1">
+              <a:shade val="50000"/>
+            </a:schemeClr>
+          </a:lnRef>
+          <a:fillRef idx="1">
+            <a:schemeClr val="accent1"/>
+          </a:fillRef>
+          <a:effectRef idx="0">
+            <a:schemeClr val="accent1"/>
+          </a:effectRef>
+          <a:fontRef idx="minor">
+            <a:schemeClr val="lt1"/>
+          </a:fontRef>
+        </p:style>
+        <p:txBody>
+          <a:bodyPr rtlCol="0" anchor="ctr"/>
+          <a:lstStyle/>
+          <a:p>
+            <a:pPr algn="ctr"/>
+            <a:endParaRPr lang="en-US"/>
+          </a:p>
+        </p:txBody>
+      </p:sp>
+      <p:pic>
+        <p:nvPicPr>
+          <p:cNvPr id="4" name="Picture 3"/>
+          <p:cNvPicPr>
+            <a:picLocks noChangeAspect="1"/>
+          </p:cNvPicPr>
+          <p:nvPr/>
+        </p:nvPicPr>
+        <p:blipFill>
+          <a:blip r:embed="rId3">
+            <a:extLst>
+              <a:ext uri="{28A0092B-C50C-407E-A947-70E740481C1C}">
+                <a14:useLocalDpi xmlns:a14="http://schemas.microsoft.com/office/drawing/2010/main" val="0"/>
+              </a:ext>
+            </a:extLst>
+          </a:blip>
+          <a:stretch>
+            <a:fillRect/>
+          </a:stretch>
+        </p:blipFill>
+        <p:spPr>
+          <a:xfrm>
+            <a:off x="2057932" y="2254645"/>
+            <a:ext cx="4686300" cy="762000"/>
+          </a:xfrm>
+          <a:prstGeom prst="rect">
+            <a:avLst/>
+          </a:prstGeom>
+        </p:spPr>
+      </p:pic>
+    </p:spTree>
+    <p:extLst>
+      <p:ext uri="{BB962C8B-B14F-4D97-AF65-F5344CB8AC3E}">
+        <p14:creationId xmlns:p14="http://schemas.microsoft.com/office/powerpoint/2010/main" val="893165779"/>
+      </p:ext>
+    </p:extLst>
+  </p:cSld>
+  <p:clrMapOvr>
+    <a:masterClrMapping/>
+  </p:clrMapOvr>
+</p:sld>
+</file>
+
+<file path=ppt/slides/slide23.xml><?xml version="1.0" encoding="utf-8"?>
+<p:sld xmlns:a="http://schemas.openxmlformats.org/drawingml/2006/main" xmlns:r="http://schemas.openxmlformats.org/officeDocument/2006/relationships" xmlns:p="http://schemas.openxmlformats.org/presentationml/2006/main">
+  <p:cSld>
+    <p:spTree>
+      <p:nvGrpSpPr>
+        <p:cNvPr id="1" name=""/>
+        <p:cNvGrpSpPr/>
+        <p:nvPr/>
+      </p:nvGrpSpPr>
+      <p:grpSpPr>
+        <a:xfrm>
+          <a:off x="0" y="0"/>
+          <a:ext cx="0" cy="0"/>
+          <a:chOff x="0" y="0"/>
+          <a:chExt cx="0" cy="0"/>
+        </a:xfrm>
+      </p:grpSpPr>
+      <p:pic>
+        <p:nvPicPr>
+          <p:cNvPr id="2" name="Picture 1"/>
+          <p:cNvPicPr>
+            <a:picLocks noChangeAspect="1"/>
+          </p:cNvPicPr>
+          <p:nvPr/>
+        </p:nvPicPr>
+        <p:blipFill>
+          <a:blip r:embed="rId2">
+            <a:extLst>
+              <a:ext uri="{28A0092B-C50C-407E-A947-70E740481C1C}">
+                <a14:useLocalDpi xmlns:a14="http://schemas.microsoft.com/office/drawing/2010/main" val="0"/>
+              </a:ext>
+            </a:extLst>
+          </a:blip>
+          <a:stretch>
+            <a:fillRect/>
+          </a:stretch>
+        </p:blipFill>
+        <p:spPr>
+          <a:xfrm>
+            <a:off x="0" y="0"/>
+            <a:ext cx="12051587" cy="6857999"/>
+          </a:xfrm>
+          <a:prstGeom prst="rect">
+            <a:avLst/>
+          </a:prstGeom>
+        </p:spPr>
+      </p:pic>
+      <p:sp>
+        <p:nvSpPr>
+          <p:cNvPr id="3" name="Down Arrow 2"/>
+          <p:cNvSpPr/>
+          <p:nvPr/>
+        </p:nvSpPr>
+        <p:spPr>
+          <a:xfrm rot="3386723">
+            <a:off x="3154168" y="2691828"/>
+            <a:ext cx="484632" cy="978408"/>
+          </a:xfrm>
+          <a:prstGeom prst="downArrow">
+            <a:avLst/>
+          </a:prstGeom>
+        </p:spPr>
+        <p:style>
+          <a:lnRef idx="2">
+            <a:schemeClr val="accent1">
+              <a:shade val="50000"/>
+            </a:schemeClr>
+          </a:lnRef>
+          <a:fillRef idx="1">
+            <a:schemeClr val="accent1"/>
+          </a:fillRef>
+          <a:effectRef idx="0">
+            <a:schemeClr val="accent1"/>
+          </a:effectRef>
+          <a:fontRef idx="minor">
+            <a:schemeClr val="lt1"/>
+          </a:fontRef>
+        </p:style>
+        <p:txBody>
+          <a:bodyPr rtlCol="0" anchor="ctr"/>
+          <a:lstStyle/>
+          <a:p>
+            <a:pPr algn="ctr"/>
+            <a:endParaRPr lang="en-US"/>
+          </a:p>
+        </p:txBody>
+      </p:sp>
+      <p:pic>
+        <p:nvPicPr>
+          <p:cNvPr id="4" name="Picture 3"/>
+          <p:cNvPicPr>
+            <a:picLocks noChangeAspect="1"/>
+          </p:cNvPicPr>
+          <p:nvPr/>
+        </p:nvPicPr>
+        <p:blipFill>
+          <a:blip r:embed="rId3">
+            <a:extLst>
+              <a:ext uri="{28A0092B-C50C-407E-A947-70E740481C1C}">
+                <a14:useLocalDpi xmlns:a14="http://schemas.microsoft.com/office/drawing/2010/main" val="0"/>
+              </a:ext>
+            </a:extLst>
+          </a:blip>
+          <a:stretch>
+            <a:fillRect/>
+          </a:stretch>
+        </p:blipFill>
+        <p:spPr>
+          <a:xfrm>
+            <a:off x="4054582" y="2120899"/>
+            <a:ext cx="6959600" cy="1308100"/>
+          </a:xfrm>
+          <a:prstGeom prst="rect">
+            <a:avLst/>
+          </a:prstGeom>
+        </p:spPr>
+      </p:pic>
+    </p:spTree>
+    <p:extLst>
+      <p:ext uri="{BB962C8B-B14F-4D97-AF65-F5344CB8AC3E}">
+        <p14:creationId xmlns:p14="http://schemas.microsoft.com/office/powerpoint/2010/main" val="442554247"/>
+      </p:ext>
+    </p:extLst>
+  </p:cSld>
+  <p:clrMapOvr>
+    <a:masterClrMapping/>
+  </p:clrMapOvr>
+</p:sld>
+</file>
+
+<file path=ppt/slides/slide24.xml><?xml version="1.0" encoding="utf-8"?>
+<p:sld xmlns:a="http://schemas.openxmlformats.org/drawingml/2006/main" xmlns:r="http://schemas.openxmlformats.org/officeDocument/2006/relationships" xmlns:p="http://schemas.openxmlformats.org/presentationml/2006/main">
+  <p:cSld>
+    <p:spTree>
+      <p:nvGrpSpPr>
+        <p:cNvPr id="1" name=""/>
+        <p:cNvGrpSpPr/>
+        <p:nvPr/>
+      </p:nvGrpSpPr>
+      <p:grpSpPr>
+        <a:xfrm>
+          <a:off x="0" y="0"/>
+          <a:ext cx="0" cy="0"/>
+          <a:chOff x="0" y="0"/>
+          <a:chExt cx="0" cy="0"/>
+        </a:xfrm>
+      </p:grpSpPr>
+      <p:pic>
+        <p:nvPicPr>
+          <p:cNvPr id="2" name="Picture 1"/>
+          <p:cNvPicPr>
+            <a:picLocks noChangeAspect="1"/>
+          </p:cNvPicPr>
+          <p:nvPr/>
+        </p:nvPicPr>
+        <p:blipFill>
+          <a:blip r:embed="rId2">
+            <a:extLst>
+              <a:ext uri="{28A0092B-C50C-407E-A947-70E740481C1C}">
+                <a14:useLocalDpi xmlns:a14="http://schemas.microsoft.com/office/drawing/2010/main" val="0"/>
+              </a:ext>
+            </a:extLst>
+          </a:blip>
+          <a:stretch>
+            <a:fillRect/>
+          </a:stretch>
+        </p:blipFill>
+        <p:spPr>
+          <a:xfrm>
+            <a:off x="0" y="91079"/>
+            <a:ext cx="12051587" cy="6857999"/>
+          </a:xfrm>
+          <a:prstGeom prst="rect">
+            <a:avLst/>
+          </a:prstGeom>
+        </p:spPr>
+      </p:pic>
+      <p:sp>
+        <p:nvSpPr>
+          <p:cNvPr id="3" name="Down Arrow 2"/>
+          <p:cNvSpPr/>
+          <p:nvPr/>
+        </p:nvSpPr>
+        <p:spPr>
+          <a:xfrm rot="3386723">
+            <a:off x="1047965" y="3030875"/>
+            <a:ext cx="484632" cy="978408"/>
+          </a:xfrm>
+          <a:prstGeom prst="downArrow">
+            <a:avLst/>
+          </a:prstGeom>
+        </p:spPr>
+        <p:style>
+          <a:lnRef idx="2">
+            <a:schemeClr val="accent1">
+              <a:shade val="50000"/>
+            </a:schemeClr>
+          </a:lnRef>
+          <a:fillRef idx="1">
+            <a:schemeClr val="accent1"/>
+          </a:fillRef>
+          <a:effectRef idx="0">
+            <a:schemeClr val="accent1"/>
+          </a:effectRef>
+          <a:fontRef idx="minor">
+            <a:schemeClr val="lt1"/>
+          </a:fontRef>
+        </p:style>
+        <p:txBody>
+          <a:bodyPr rtlCol="0" anchor="ctr"/>
+          <a:lstStyle/>
+          <a:p>
+            <a:pPr algn="ctr"/>
+            <a:endParaRPr lang="en-US"/>
+          </a:p>
+        </p:txBody>
+      </p:sp>
+      <p:pic>
+        <p:nvPicPr>
+          <p:cNvPr id="4" name="Picture 3"/>
+          <p:cNvPicPr>
+            <a:picLocks noChangeAspect="1"/>
+          </p:cNvPicPr>
+          <p:nvPr/>
+        </p:nvPicPr>
+        <p:blipFill>
+          <a:blip r:embed="rId3">
+            <a:extLst>
+              <a:ext uri="{28A0092B-C50C-407E-A947-70E740481C1C}">
+                <a14:useLocalDpi xmlns:a14="http://schemas.microsoft.com/office/drawing/2010/main" val="0"/>
+              </a:ext>
+            </a:extLst>
+          </a:blip>
+          <a:stretch>
+            <a:fillRect/>
+          </a:stretch>
+        </p:blipFill>
+        <p:spPr>
+          <a:xfrm>
+            <a:off x="1831900" y="2924454"/>
+            <a:ext cx="2247900" cy="736600"/>
+          </a:xfrm>
+          <a:prstGeom prst="rect">
+            <a:avLst/>
+          </a:prstGeom>
+        </p:spPr>
+      </p:pic>
+    </p:spTree>
+    <p:extLst>
+      <p:ext uri="{BB962C8B-B14F-4D97-AF65-F5344CB8AC3E}">
+        <p14:creationId xmlns:p14="http://schemas.microsoft.com/office/powerpoint/2010/main" val="1193620295"/>
+      </p:ext>
+    </p:extLst>
+  </p:cSld>
+  <p:clrMapOvr>
+    <a:masterClrMapping/>
+  </p:clrMapOvr>
+</p:sld>
+</file>
+
+<file path=ppt/slides/slide25.xml><?xml version="1.0" encoding="utf-8"?>
+<p:sld xmlns:a="http://schemas.openxmlformats.org/drawingml/2006/main" xmlns:r="http://schemas.openxmlformats.org/officeDocument/2006/relationships" xmlns:p="http://schemas.openxmlformats.org/presentationml/2006/main">
+  <p:cSld>
+    <p:spTree>
+      <p:nvGrpSpPr>
+        <p:cNvPr id="1" name=""/>
+        <p:cNvGrpSpPr/>
+        <p:nvPr/>
+      </p:nvGrpSpPr>
+      <p:grpSpPr>
+        <a:xfrm>
+          <a:off x="0" y="0"/>
+          <a:ext cx="0" cy="0"/>
+          <a:chOff x="0" y="0"/>
+          <a:chExt cx="0" cy="0"/>
+        </a:xfrm>
+      </p:grpSpPr>
+      <p:pic>
+        <p:nvPicPr>
+          <p:cNvPr id="2" name="Picture 1"/>
+          <p:cNvPicPr>
+            <a:picLocks noChangeAspect="1"/>
+          </p:cNvPicPr>
+          <p:nvPr/>
+        </p:nvPicPr>
+        <p:blipFill>
+          <a:blip r:embed="rId2">
+            <a:extLst>
+              <a:ext uri="{28A0092B-C50C-407E-A947-70E740481C1C}">
+                <a14:useLocalDpi xmlns:a14="http://schemas.microsoft.com/office/drawing/2010/main" val="0"/>
+              </a:ext>
+            </a:extLst>
+          </a:blip>
+          <a:stretch>
+            <a:fillRect/>
+          </a:stretch>
+        </p:blipFill>
+        <p:spPr>
+          <a:xfrm>
+            <a:off x="0" y="0"/>
+            <a:ext cx="12051587" cy="6857999"/>
+          </a:xfrm>
+          <a:prstGeom prst="rect">
+            <a:avLst/>
+          </a:prstGeom>
+        </p:spPr>
+      </p:pic>
+      <p:sp>
+        <p:nvSpPr>
+          <p:cNvPr id="3" name="Down Arrow 2"/>
+          <p:cNvSpPr/>
+          <p:nvPr/>
+        </p:nvSpPr>
+        <p:spPr>
+          <a:xfrm rot="3386723">
+            <a:off x="1684962" y="3412130"/>
+            <a:ext cx="484632" cy="978408"/>
+          </a:xfrm>
+          <a:prstGeom prst="downArrow">
+            <a:avLst/>
+          </a:prstGeom>
+        </p:spPr>
+        <p:style>
+          <a:lnRef idx="2">
+            <a:schemeClr val="accent1">
+              <a:shade val="50000"/>
+            </a:schemeClr>
+          </a:lnRef>
+          <a:fillRef idx="1">
+            <a:schemeClr val="accent1"/>
+          </a:fillRef>
+          <a:effectRef idx="0">
+            <a:schemeClr val="accent1"/>
+          </a:effectRef>
+          <a:fontRef idx="minor">
+            <a:schemeClr val="lt1"/>
+          </a:fontRef>
+        </p:style>
+        <p:txBody>
+          <a:bodyPr rtlCol="0" anchor="ctr"/>
+          <a:lstStyle/>
+          <a:p>
+            <a:pPr algn="ctr"/>
+            <a:endParaRPr lang="en-US"/>
+          </a:p>
+        </p:txBody>
+      </p:sp>
+      <p:pic>
+        <p:nvPicPr>
+          <p:cNvPr id="4" name="Picture 3"/>
+          <p:cNvPicPr>
+            <a:picLocks noChangeAspect="1"/>
+          </p:cNvPicPr>
+          <p:nvPr/>
+        </p:nvPicPr>
+        <p:blipFill>
+          <a:blip r:embed="rId3">
+            <a:extLst>
+              <a:ext uri="{28A0092B-C50C-407E-A947-70E740481C1C}">
+                <a14:useLocalDpi xmlns:a14="http://schemas.microsoft.com/office/drawing/2010/main" val="0"/>
+              </a:ext>
+            </a:extLst>
+          </a:blip>
+          <a:stretch>
+            <a:fillRect/>
+          </a:stretch>
+        </p:blipFill>
+        <p:spPr>
+          <a:xfrm>
+            <a:off x="2468897" y="2076949"/>
+            <a:ext cx="6159500" cy="2095500"/>
+          </a:xfrm>
+          <a:prstGeom prst="rect">
+            <a:avLst/>
+          </a:prstGeom>
+        </p:spPr>
+      </p:pic>
+    </p:spTree>
+    <p:extLst>
+      <p:ext uri="{BB962C8B-B14F-4D97-AF65-F5344CB8AC3E}">
+        <p14:creationId xmlns:p14="http://schemas.microsoft.com/office/powerpoint/2010/main" val="405302442"/>
+      </p:ext>
+    </p:extLst>
+  </p:cSld>
+  <p:clrMapOvr>
+    <a:masterClrMapping/>
+  </p:clrMapOvr>
+</p:sld>
+</file>
+
+<file path=ppt/slides/slide26.xml><?xml version="1.0" encoding="utf-8"?>
+<p:sld xmlns:a="http://schemas.openxmlformats.org/drawingml/2006/main" xmlns:r="http://schemas.openxmlformats.org/officeDocument/2006/relationships" xmlns:p="http://schemas.openxmlformats.org/presentationml/2006/main">
+  <p:cSld>
+    <p:spTree>
+      <p:nvGrpSpPr>
+        <p:cNvPr id="1" name=""/>
+        <p:cNvGrpSpPr/>
+        <p:nvPr/>
+      </p:nvGrpSpPr>
+      <p:grpSpPr>
+        <a:xfrm>
+          <a:off x="0" y="0"/>
+          <a:ext cx="0" cy="0"/>
+          <a:chOff x="0" y="0"/>
+          <a:chExt cx="0" cy="0"/>
+        </a:xfrm>
+      </p:grpSpPr>
+      <p:pic>
+        <p:nvPicPr>
+          <p:cNvPr id="2" name="Picture 1"/>
+          <p:cNvPicPr>
+            <a:picLocks noChangeAspect="1"/>
+          </p:cNvPicPr>
+          <p:nvPr/>
+        </p:nvPicPr>
+        <p:blipFill>
+          <a:blip r:embed="rId2">
+            <a:extLst>
+              <a:ext uri="{28A0092B-C50C-407E-A947-70E740481C1C}">
+                <a14:useLocalDpi xmlns:a14="http://schemas.microsoft.com/office/drawing/2010/main" val="0"/>
+              </a:ext>
+            </a:extLst>
+          </a:blip>
+          <a:stretch>
+            <a:fillRect/>
+          </a:stretch>
+        </p:blipFill>
+        <p:spPr>
+          <a:xfrm>
+            <a:off x="0" y="0"/>
+            <a:ext cx="12051587" cy="6857999"/>
+          </a:xfrm>
+          <a:prstGeom prst="rect">
+            <a:avLst/>
+          </a:prstGeom>
+        </p:spPr>
+      </p:pic>
+      <p:sp>
+        <p:nvSpPr>
+          <p:cNvPr id="3" name="Down Arrow 2"/>
+          <p:cNvSpPr/>
+          <p:nvPr/>
+        </p:nvSpPr>
+        <p:spPr>
+          <a:xfrm rot="3386723">
+            <a:off x="574265" y="3751179"/>
+            <a:ext cx="484632" cy="978408"/>
+          </a:xfrm>
+          <a:prstGeom prst="downArrow">
+            <a:avLst/>
+          </a:prstGeom>
+        </p:spPr>
+        <p:style>
+          <a:lnRef idx="2">
+            <a:schemeClr val="accent1">
+              <a:shade val="50000"/>
+            </a:schemeClr>
+          </a:lnRef>
+          <a:fillRef idx="1">
+            <a:schemeClr val="accent1"/>
+          </a:fillRef>
+          <a:effectRef idx="0">
+            <a:schemeClr val="accent1"/>
+          </a:effectRef>
+          <a:fontRef idx="minor">
+            <a:schemeClr val="lt1"/>
+          </a:fontRef>
+        </p:style>
+        <p:txBody>
+          <a:bodyPr rtlCol="0" anchor="ctr"/>
+          <a:lstStyle/>
+          <a:p>
+            <a:pPr algn="ctr"/>
+            <a:endParaRPr lang="en-US"/>
+          </a:p>
+        </p:txBody>
+      </p:sp>
+      <p:pic>
+        <p:nvPicPr>
+          <p:cNvPr id="4" name="Picture 3"/>
+          <p:cNvPicPr>
+            <a:picLocks noChangeAspect="1"/>
+          </p:cNvPicPr>
+          <p:nvPr/>
+        </p:nvPicPr>
+        <p:blipFill>
+          <a:blip r:embed="rId3">
+            <a:extLst>
+              <a:ext uri="{28A0092B-C50C-407E-A947-70E740481C1C}">
+                <a14:useLocalDpi xmlns:a14="http://schemas.microsoft.com/office/drawing/2010/main" val="0"/>
+              </a:ext>
+            </a:extLst>
+          </a:blip>
+          <a:stretch>
+            <a:fillRect/>
+          </a:stretch>
+        </p:blipFill>
+        <p:spPr>
+          <a:xfrm>
+            <a:off x="1358200" y="2381249"/>
+            <a:ext cx="6159500" cy="2095500"/>
+          </a:xfrm>
+          <a:prstGeom prst="rect">
+            <a:avLst/>
+          </a:prstGeom>
+        </p:spPr>
+      </p:pic>
+    </p:spTree>
+    <p:extLst>
+      <p:ext uri="{BB962C8B-B14F-4D97-AF65-F5344CB8AC3E}">
+        <p14:creationId xmlns:p14="http://schemas.microsoft.com/office/powerpoint/2010/main" val="1868073123"/>
+      </p:ext>
+    </p:extLst>
+  </p:cSld>
+  <p:clrMapOvr>
+    <a:masterClrMapping/>
+  </p:clrMapOvr>
+</p:sld>
+</file>
+
+<file path=ppt/slides/slide27.xml><?xml version="1.0" encoding="utf-8"?>
+<p:sld xmlns:a="http://schemas.openxmlformats.org/drawingml/2006/main" xmlns:r="http://schemas.openxmlformats.org/officeDocument/2006/relationships" xmlns:p="http://schemas.openxmlformats.org/presentationml/2006/main">
+  <p:cSld>
+    <p:spTree>
+      <p:nvGrpSpPr>
+        <p:cNvPr id="1" name=""/>
+        <p:cNvGrpSpPr/>
+        <p:nvPr/>
+      </p:nvGrpSpPr>
+      <p:grpSpPr>
+        <a:xfrm>
+          <a:off x="0" y="0"/>
+          <a:ext cx="0" cy="0"/>
+          <a:chOff x="0" y="0"/>
+          <a:chExt cx="0" cy="0"/>
+        </a:xfrm>
+      </p:grpSpPr>
+      <p:pic>
+        <p:nvPicPr>
+          <p:cNvPr id="2" name="Picture 1"/>
+          <p:cNvPicPr>
+            <a:picLocks noChangeAspect="1"/>
+          </p:cNvPicPr>
+          <p:nvPr/>
+        </p:nvPicPr>
+        <p:blipFill>
+          <a:blip r:embed="rId2">
+            <a:extLst>
+              <a:ext uri="{28A0092B-C50C-407E-A947-70E740481C1C}">
+                <a14:useLocalDpi xmlns:a14="http://schemas.microsoft.com/office/drawing/2010/main" val="0"/>
+              </a:ext>
+            </a:extLst>
+          </a:blip>
+          <a:stretch>
+            <a:fillRect/>
+          </a:stretch>
+        </p:blipFill>
+        <p:spPr>
+          <a:xfrm>
+            <a:off x="140413" y="255182"/>
+            <a:ext cx="12051587" cy="6857999"/>
+          </a:xfrm>
+          <a:prstGeom prst="rect">
+            <a:avLst/>
+          </a:prstGeom>
+        </p:spPr>
+      </p:pic>
+      <p:sp>
+        <p:nvSpPr>
+          <p:cNvPr id="3" name="Down Arrow 2"/>
+          <p:cNvSpPr/>
+          <p:nvPr/>
+        </p:nvSpPr>
+        <p:spPr>
+          <a:xfrm rot="3386723">
+            <a:off x="1654139" y="4100498"/>
+            <a:ext cx="484632" cy="978408"/>
+          </a:xfrm>
+          <a:prstGeom prst="downArrow">
+            <a:avLst/>
+          </a:prstGeom>
+        </p:spPr>
+        <p:style>
+          <a:lnRef idx="2">
+            <a:schemeClr val="accent1">
+              <a:shade val="50000"/>
+            </a:schemeClr>
+          </a:lnRef>
+          <a:fillRef idx="1">
+            <a:schemeClr val="accent1"/>
+          </a:fillRef>
+          <a:effectRef idx="0">
+            <a:schemeClr val="accent1"/>
+          </a:effectRef>
+          <a:fontRef idx="minor">
+            <a:schemeClr val="lt1"/>
+          </a:fontRef>
+        </p:style>
+        <p:txBody>
+          <a:bodyPr rtlCol="0" anchor="ctr"/>
+          <a:lstStyle/>
+          <a:p>
+            <a:pPr algn="ctr"/>
+            <a:endParaRPr lang="en-US"/>
+          </a:p>
+        </p:txBody>
+      </p:sp>
+      <p:pic>
+        <p:nvPicPr>
+          <p:cNvPr id="4" name="Picture 3"/>
+          <p:cNvPicPr>
+            <a:picLocks noChangeAspect="1"/>
+          </p:cNvPicPr>
+          <p:nvPr/>
+        </p:nvPicPr>
+        <p:blipFill>
+          <a:blip r:embed="rId3">
+            <a:extLst>
+              <a:ext uri="{28A0092B-C50C-407E-A947-70E740481C1C}">
+                <a14:useLocalDpi xmlns:a14="http://schemas.microsoft.com/office/drawing/2010/main" val="0"/>
+              </a:ext>
+            </a:extLst>
+          </a:blip>
+          <a:stretch>
+            <a:fillRect/>
+          </a:stretch>
+        </p:blipFill>
+        <p:spPr>
+          <a:xfrm>
+            <a:off x="2530542" y="2693399"/>
+            <a:ext cx="6159500" cy="2095500"/>
+          </a:xfrm>
+          <a:prstGeom prst="rect">
+            <a:avLst/>
+          </a:prstGeom>
+        </p:spPr>
+      </p:pic>
+    </p:spTree>
+    <p:extLst>
+      <p:ext uri="{BB962C8B-B14F-4D97-AF65-F5344CB8AC3E}">
+        <p14:creationId xmlns:p14="http://schemas.microsoft.com/office/powerpoint/2010/main" val="1313906823"/>
+      </p:ext>
+    </p:extLst>
+  </p:cSld>
+  <p:clrMapOvr>
+    <a:masterClrMapping/>
+  </p:clrMapOvr>
+</p:sld>
+</file>
+
+<file path=ppt/slides/slide28.xml><?xml version="1.0" encoding="utf-8"?>
+<p:sld xmlns:a="http://schemas.openxmlformats.org/drawingml/2006/main" xmlns:r="http://schemas.openxmlformats.org/officeDocument/2006/relationships" xmlns:p="http://schemas.openxmlformats.org/presentationml/2006/main">
+  <p:cSld>
+    <p:spTree>
+      <p:nvGrpSpPr>
+        <p:cNvPr id="1" name=""/>
+        <p:cNvGrpSpPr/>
+        <p:nvPr/>
+      </p:nvGrpSpPr>
+      <p:grpSpPr>
+        <a:xfrm>
+          <a:off x="0" y="0"/>
+          <a:ext cx="0" cy="0"/>
+          <a:chOff x="0" y="0"/>
+          <a:chExt cx="0" cy="0"/>
+        </a:xfrm>
+      </p:grpSpPr>
+      <p:pic>
+        <p:nvPicPr>
+          <p:cNvPr id="2" name="Picture 1"/>
+          <p:cNvPicPr>
+            <a:picLocks noChangeAspect="1"/>
+          </p:cNvPicPr>
+          <p:nvPr/>
+        </p:nvPicPr>
+        <p:blipFill>
+          <a:blip r:embed="rId2">
+            <a:extLst>
+              <a:ext uri="{28A0092B-C50C-407E-A947-70E740481C1C}">
+                <a14:useLocalDpi xmlns:a14="http://schemas.microsoft.com/office/drawing/2010/main" val="0"/>
+              </a:ext>
+            </a:extLst>
+          </a:blip>
+          <a:stretch>
+            <a:fillRect/>
+          </a:stretch>
+        </p:blipFill>
+        <p:spPr>
+          <a:xfrm>
+            <a:off x="0" y="0"/>
+            <a:ext cx="10350500" cy="3797300"/>
+          </a:xfrm>
+          <a:prstGeom prst="rect">
+            <a:avLst/>
+          </a:prstGeom>
+        </p:spPr>
+      </p:pic>
+      <p:pic>
+        <p:nvPicPr>
+          <p:cNvPr id="3" name="Picture 2"/>
+          <p:cNvPicPr>
+            <a:picLocks noChangeAspect="1"/>
+          </p:cNvPicPr>
+          <p:nvPr/>
+        </p:nvPicPr>
+        <p:blipFill>
+          <a:blip r:embed="rId3">
+            <a:extLst>
+              <a:ext uri="{28A0092B-C50C-407E-A947-70E740481C1C}">
+                <a14:useLocalDpi xmlns:a14="http://schemas.microsoft.com/office/drawing/2010/main" val="0"/>
+              </a:ext>
+            </a:extLst>
+          </a:blip>
+          <a:stretch>
+            <a:fillRect/>
+          </a:stretch>
+        </p:blipFill>
+        <p:spPr>
+          <a:xfrm>
+            <a:off x="7397393" y="88328"/>
+            <a:ext cx="4506503" cy="6620695"/>
+          </a:xfrm>
+          <a:prstGeom prst="rect">
+            <a:avLst/>
+          </a:prstGeom>
+        </p:spPr>
+      </p:pic>
+    </p:spTree>
+    <p:extLst>
+      <p:ext uri="{BB962C8B-B14F-4D97-AF65-F5344CB8AC3E}">
+        <p14:creationId xmlns:p14="http://schemas.microsoft.com/office/powerpoint/2010/main" val="2049323339"/>
+      </p:ext>
+    </p:extLst>
+  </p:cSld>
+  <p:clrMapOvr>
+    <a:masterClrMapping/>
+  </p:clrMapOvr>
+</p:sld>
+</file>
+
+<file path=ppt/slides/slide29.xml><?xml version="1.0" encoding="utf-8"?>
+<p:sld xmlns:a="http://schemas.openxmlformats.org/drawingml/2006/main" xmlns:r="http://schemas.openxmlformats.org/officeDocument/2006/relationships" xmlns:p="http://schemas.openxmlformats.org/presentationml/2006/main">
+  <p:cSld>
+    <p:spTree>
+      <p:nvGrpSpPr>
+        <p:cNvPr id="1" name=""/>
+        <p:cNvGrpSpPr/>
+        <p:nvPr/>
+      </p:nvGrpSpPr>
+      <p:grpSpPr>
+        <a:xfrm>
+          <a:off x="0" y="0"/>
+          <a:ext cx="0" cy="0"/>
+          <a:chOff x="0" y="0"/>
+          <a:chExt cx="0" cy="0"/>
+        </a:xfrm>
+      </p:grpSpPr>
+      <p:sp>
+        <p:nvSpPr>
+          <p:cNvPr id="2" name="Title 1"/>
+          <p:cNvSpPr>
+            <a:spLocks noGrp="1"/>
+          </p:cNvSpPr>
+          <p:nvPr>
+            <p:ph type="title"/>
+          </p:nvPr>
+        </p:nvSpPr>
+        <p:spPr/>
+        <p:txBody>
+          <a:bodyPr>
+            <a:normAutofit/>
+          </a:bodyPr>
+          <a:lstStyle/>
+          <a:p>
+            <a:r>
+              <a:rPr lang="en-US" sz="4000" dirty="0" smtClean="0">
+                <a:latin typeface="Arial Black" charset="0"/>
+                <a:ea typeface="Arial Black" charset="0"/>
+                <a:cs typeface="Arial Black" charset="0"/>
+              </a:rPr>
+              <a:t>Reference</a:t>
+            </a:r>
+            <a:endParaRPr lang="en-US" sz="4000" dirty="0">
+              <a:latin typeface="Arial Black" charset="0"/>
+              <a:ea typeface="Arial Black" charset="0"/>
+              <a:cs typeface="Arial Black" charset="0"/>
+            </a:endParaRPr>
+          </a:p>
+        </p:txBody>
+      </p:sp>
+      <p:sp>
+        <p:nvSpPr>
+          <p:cNvPr id="3" name="Content Placeholder 2"/>
+          <p:cNvSpPr>
+            <a:spLocks noGrp="1"/>
+          </p:cNvSpPr>
+          <p:nvPr>
+            <p:ph idx="1"/>
+          </p:nvPr>
+        </p:nvSpPr>
+        <p:spPr/>
+        <p:txBody>
+          <a:bodyPr/>
+          <a:lstStyle/>
+          <a:p>
+            <a:r>
+              <a:rPr lang="en-US" dirty="0" smtClean="0">
+                <a:hlinkClick r:id="rId2"/>
+              </a:rPr>
+              <a:t>code</a:t>
+            </a:r>
+            <a:endParaRPr lang="en-US" dirty="0"/>
+          </a:p>
+        </p:txBody>
+      </p:sp>
+    </p:spTree>
+    <p:extLst>
+      <p:ext uri="{BB962C8B-B14F-4D97-AF65-F5344CB8AC3E}">
+        <p14:creationId xmlns:p14="http://schemas.microsoft.com/office/powerpoint/2010/main" val="1102937009"/>
+      </p:ext>
+    </p:extLst>
+  </p:cSld>
+  <p:clrMapOvr>
+    <a:masterClrMapping/>
+  </p:clrMapOvr>
+</p:sld>
+</file>
+
+<file path=ppt/slides/slide3.xml><?xml version="1.0" encoding="utf-8"?>
+<p:sld xmlns:a="http://schemas.openxmlformats.org/drawingml/2006/main" xmlns:r="http://schemas.openxmlformats.org/officeDocument/2006/relationships" xmlns:p="http://schemas.openxmlformats.org/presentationml/2006/main">
+  <p:cSld>
+    <p:spTree>
+      <p:nvGrpSpPr>
+        <p:cNvPr id="1" name=""/>
+        <p:cNvGrpSpPr/>
+        <p:nvPr/>
+      </p:nvGrpSpPr>
+      <p:grpSpPr>
+        <a:xfrm>
+          <a:off x="0" y="0"/>
+          <a:ext cx="0" cy="0"/>
+          <a:chOff x="0" y="0"/>
+          <a:chExt cx="0" cy="0"/>
+        </a:xfrm>
+      </p:grpSpPr>
+      <p:sp>
+        <p:nvSpPr>
+          <p:cNvPr id="2" name="Title 1"/>
+          <p:cNvSpPr>
+            <a:spLocks noGrp="1"/>
+          </p:cNvSpPr>
+          <p:nvPr>
+            <p:ph type="ctrTitle"/>
+          </p:nvPr>
+        </p:nvSpPr>
+        <p:spPr/>
+        <p:txBody>
+          <a:bodyPr>
+            <a:normAutofit fontScale="90000"/>
+          </a:bodyPr>
+          <a:lstStyle/>
+          <a:p>
+            <a:r>
+              <a:rPr lang="en-US" sz="4000" dirty="0" smtClean="0">
+                <a:latin typeface="Arial Black" charset="0"/>
+                <a:ea typeface="Arial Black" charset="0"/>
+                <a:cs typeface="Arial Black" charset="0"/>
+              </a:rPr>
+              <a:t/>
+            </a:r>
+            <a:br>
+              <a:rPr lang="en-US" sz="4000" dirty="0" smtClean="0">
+                <a:latin typeface="Arial Black" charset="0"/>
+                <a:ea typeface="Arial Black" charset="0"/>
+                <a:cs typeface="Arial Black" charset="0"/>
+              </a:rPr>
+            </a:br>
+            <a:r>
+              <a:rPr lang="en-US" sz="4000" dirty="0">
+                <a:latin typeface="Arial Black" charset="0"/>
+                <a:ea typeface="Arial Black" charset="0"/>
+                <a:cs typeface="Arial Black" charset="0"/>
+              </a:rPr>
+              <a:t/>
+            </a:r>
+            <a:br>
+              <a:rPr lang="en-US" sz="4000" dirty="0">
+                <a:latin typeface="Arial Black" charset="0"/>
+                <a:ea typeface="Arial Black" charset="0"/>
+                <a:cs typeface="Arial Black" charset="0"/>
+              </a:rPr>
+            </a:br>
+            <a:r>
+              <a:rPr lang="en-US" sz="4000" dirty="0" smtClean="0">
+                <a:latin typeface="Arial Black" charset="0"/>
+                <a:ea typeface="Arial Black" charset="0"/>
+                <a:cs typeface="Arial Black" charset="0"/>
+              </a:rPr>
+              <a:t/>
+            </a:r>
+            <a:br>
+              <a:rPr lang="en-US" sz="4000" dirty="0" smtClean="0">
+                <a:latin typeface="Arial Black" charset="0"/>
+                <a:ea typeface="Arial Black" charset="0"/>
+                <a:cs typeface="Arial Black" charset="0"/>
+              </a:rPr>
+            </a:br>
+            <a:r>
+              <a:rPr lang="en-US" sz="4000" dirty="0">
+                <a:latin typeface="Arial Black" charset="0"/>
+                <a:ea typeface="Arial Black" charset="0"/>
+                <a:cs typeface="Arial Black" charset="0"/>
+              </a:rPr>
+              <a:t/>
+            </a:r>
+            <a:br>
+              <a:rPr lang="en-US" sz="4000" dirty="0">
+                <a:latin typeface="Arial Black" charset="0"/>
+                <a:ea typeface="Arial Black" charset="0"/>
+                <a:cs typeface="Arial Black" charset="0"/>
+              </a:rPr>
+            </a:br>
+            <a:r>
+              <a:rPr lang="en-US" sz="4000" dirty="0" smtClean="0">
+                <a:latin typeface="Arial Black" charset="0"/>
+                <a:ea typeface="Arial Black" charset="0"/>
+                <a:cs typeface="Arial Black" charset="0"/>
+              </a:rPr>
+              <a:t/>
+            </a:r>
+            <a:br>
+              <a:rPr lang="en-US" sz="4000" dirty="0" smtClean="0">
+                <a:latin typeface="Arial Black" charset="0"/>
+                <a:ea typeface="Arial Black" charset="0"/>
+                <a:cs typeface="Arial Black" charset="0"/>
+              </a:rPr>
+            </a:br>
+            <a:r>
+              <a:rPr lang="en-US" sz="4000" dirty="0">
+                <a:latin typeface="Arial Black" charset="0"/>
+                <a:ea typeface="Arial Black" charset="0"/>
+                <a:cs typeface="Arial Black" charset="0"/>
+              </a:rPr>
+              <a:t/>
+            </a:r>
+            <a:br>
+              <a:rPr lang="en-US" sz="4000" dirty="0">
+                <a:latin typeface="Arial Black" charset="0"/>
+                <a:ea typeface="Arial Black" charset="0"/>
+                <a:cs typeface="Arial Black" charset="0"/>
+              </a:rPr>
+            </a:br>
+            <a:r>
+              <a:rPr lang="en-US" sz="4000" dirty="0" smtClean="0">
+                <a:latin typeface="Arial Black" charset="0"/>
+                <a:ea typeface="Arial Black" charset="0"/>
+                <a:cs typeface="Arial Black" charset="0"/>
+              </a:rPr>
+              <a:t/>
+            </a:r>
+            <a:br>
+              <a:rPr lang="en-US" sz="4000" dirty="0" smtClean="0">
+                <a:latin typeface="Arial Black" charset="0"/>
+                <a:ea typeface="Arial Black" charset="0"/>
+                <a:cs typeface="Arial Black" charset="0"/>
+              </a:rPr>
+            </a:br>
+            <a:r>
+              <a:rPr lang="en-US" sz="4000" dirty="0">
+                <a:latin typeface="Arial Black" charset="0"/>
+                <a:ea typeface="Arial Black" charset="0"/>
+                <a:cs typeface="Arial Black" charset="0"/>
+              </a:rPr>
+              <a:t/>
+            </a:r>
+            <a:br>
+              <a:rPr lang="en-US" sz="4000" dirty="0">
+                <a:latin typeface="Arial Black" charset="0"/>
+                <a:ea typeface="Arial Black" charset="0"/>
+                <a:cs typeface="Arial Black" charset="0"/>
+              </a:rPr>
+            </a:br>
+            <a:r>
+              <a:rPr lang="en-US" sz="4000" dirty="0" smtClean="0">
+                <a:latin typeface="Arial Black" charset="0"/>
+                <a:ea typeface="Arial Black" charset="0"/>
+                <a:cs typeface="Arial Black" charset="0"/>
+              </a:rPr>
+              <a:t/>
+            </a:r>
+            <a:br>
+              <a:rPr lang="en-US" sz="4000" dirty="0" smtClean="0">
+                <a:latin typeface="Arial Black" charset="0"/>
+                <a:ea typeface="Arial Black" charset="0"/>
+                <a:cs typeface="Arial Black" charset="0"/>
+              </a:rPr>
+            </a:br>
+            <a:r>
+              <a:rPr lang="en-US" sz="4000" dirty="0">
+                <a:latin typeface="Arial Black" charset="0"/>
+                <a:ea typeface="Arial Black" charset="0"/>
+                <a:cs typeface="Arial Black" charset="0"/>
+              </a:rPr>
+              <a:t/>
+            </a:r>
+            <a:br>
+              <a:rPr lang="en-US" sz="4000" dirty="0">
+                <a:latin typeface="Arial Black" charset="0"/>
+                <a:ea typeface="Arial Black" charset="0"/>
+                <a:cs typeface="Arial Black" charset="0"/>
+              </a:rPr>
+            </a:br>
+            <a:r>
+              <a:rPr lang="en-US" sz="4000" dirty="0" smtClean="0">
+                <a:latin typeface="Arial Black" charset="0"/>
+                <a:ea typeface="Arial Black" charset="0"/>
+                <a:cs typeface="Arial Black" charset="0"/>
+              </a:rPr>
+              <a:t/>
+            </a:r>
+            <a:br>
+              <a:rPr lang="en-US" sz="4000" dirty="0" smtClean="0">
+                <a:latin typeface="Arial Black" charset="0"/>
+                <a:ea typeface="Arial Black" charset="0"/>
+                <a:cs typeface="Arial Black" charset="0"/>
+              </a:rPr>
+            </a:br>
+            <a:r>
+              <a:rPr lang="en-US" sz="4400" dirty="0" smtClean="0">
+                <a:latin typeface="Arial Black" charset="0"/>
+                <a:ea typeface="Arial Black" charset="0"/>
+                <a:cs typeface="Arial Black" charset="0"/>
+              </a:rPr>
+              <a:t/>
+            </a:r>
+            <a:br>
+              <a:rPr lang="en-US" sz="4400" dirty="0" smtClean="0">
+                <a:latin typeface="Arial Black" charset="0"/>
+                <a:ea typeface="Arial Black" charset="0"/>
+                <a:cs typeface="Arial Black" charset="0"/>
+              </a:rPr>
+            </a:br>
+            <a:r>
+              <a:rPr lang="en-US" sz="6700" dirty="0">
+                <a:latin typeface="Arial Black" charset="0"/>
+                <a:ea typeface="Arial Black" charset="0"/>
+                <a:cs typeface="Arial Black" charset="0"/>
+              </a:rPr>
+              <a:t> </a:t>
+            </a:r>
+            <a:r>
+              <a:rPr lang="en-US" sz="6700" dirty="0" smtClean="0">
+                <a:latin typeface="Arial Black" charset="0"/>
+                <a:ea typeface="Arial Black" charset="0"/>
+                <a:cs typeface="Arial Black" charset="0"/>
+              </a:rPr>
+              <a:t>Linear Regression</a:t>
+            </a:r>
+            <a:br>
+              <a:rPr lang="en-US" sz="6700" dirty="0" smtClean="0">
+                <a:latin typeface="Arial Black" charset="0"/>
+                <a:ea typeface="Arial Black" charset="0"/>
+                <a:cs typeface="Arial Black" charset="0"/>
+              </a:rPr>
+            </a:br>
+            <a:r>
+              <a:rPr lang="en-US" sz="6700" dirty="0" smtClean="0">
+                <a:latin typeface="Arial Black" charset="0"/>
+                <a:ea typeface="Arial Black" charset="0"/>
+                <a:cs typeface="Arial Black" charset="0"/>
+              </a:rPr>
+              <a:t>with</a:t>
+            </a:r>
+            <a:br>
+              <a:rPr lang="en-US" sz="6700" dirty="0" smtClean="0">
+                <a:latin typeface="Arial Black" charset="0"/>
+                <a:ea typeface="Arial Black" charset="0"/>
+                <a:cs typeface="Arial Black" charset="0"/>
+              </a:rPr>
+            </a:br>
+            <a:r>
+              <a:rPr lang="en-US" sz="6700" dirty="0" smtClean="0">
+                <a:latin typeface="Arial Black" charset="0"/>
+                <a:ea typeface="Arial Black" charset="0"/>
+                <a:cs typeface="Arial Black" charset="0"/>
+              </a:rPr>
+              <a:t>R Style Package</a:t>
+            </a:r>
+            <a:endParaRPr lang="en-US" dirty="0"/>
+          </a:p>
+        </p:txBody>
+      </p:sp>
+      <p:pic>
+        <p:nvPicPr>
+          <p:cNvPr id="3" name="Picture 2"/>
+          <p:cNvPicPr>
+            <a:picLocks noChangeAspect="1"/>
+          </p:cNvPicPr>
+          <p:nvPr/>
+        </p:nvPicPr>
+        <p:blipFill>
+          <a:blip r:embed="rId2">
+            <a:extLst>
+              <a:ext uri="{28A0092B-C50C-407E-A947-70E740481C1C}">
+                <a14:useLocalDpi xmlns:a14="http://schemas.microsoft.com/office/drawing/2010/main" val="0"/>
+              </a:ext>
+            </a:extLst>
+          </a:blip>
+          <a:stretch>
+            <a:fillRect/>
+          </a:stretch>
+        </p:blipFill>
+        <p:spPr>
+          <a:xfrm>
+            <a:off x="2908300" y="4345683"/>
+            <a:ext cx="6375400" cy="393700"/>
+          </a:xfrm>
+          <a:prstGeom prst="rect">
+            <a:avLst/>
+          </a:prstGeom>
+        </p:spPr>
+      </p:pic>
+    </p:spTree>
+    <p:extLst>
+      <p:ext uri="{BB962C8B-B14F-4D97-AF65-F5344CB8AC3E}">
+        <p14:creationId xmlns:p14="http://schemas.microsoft.com/office/powerpoint/2010/main" val="1925072009"/>
       </p:ext>
     </p:extLst>
   </p:cSld>
@@ -3487,8 +5854,8 @@
         </p:blipFill>
         <p:spPr>
           <a:xfrm>
-            <a:off x="620486" y="893449"/>
-            <a:ext cx="10813638" cy="5071101"/>
+            <a:off x="620486" y="1035674"/>
+            <a:ext cx="10813638" cy="4786650"/>
           </a:xfrm>
           <a:prstGeom prst="rect">
             <a:avLst/>
@@ -3498,7 +5865,7 @@
     </p:spTree>
     <p:extLst>
       <p:ext uri="{BB962C8B-B14F-4D97-AF65-F5344CB8AC3E}">
-        <p14:creationId xmlns:p14="http://schemas.microsoft.com/office/powerpoint/2010/main" val="1315704433"/>
+        <p14:creationId xmlns:p14="http://schemas.microsoft.com/office/powerpoint/2010/main" val="352263541"/>
       </p:ext>
     </p:extLst>
   </p:cSld>
@@ -3547,8 +5914,8 @@
         </p:blipFill>
         <p:spPr>
           <a:xfrm>
-            <a:off x="620486" y="769053"/>
-            <a:ext cx="10813638" cy="5319892"/>
+            <a:off x="620486" y="893449"/>
+            <a:ext cx="10813638" cy="5071101"/>
           </a:xfrm>
           <a:prstGeom prst="rect">
             <a:avLst/>
@@ -3558,7 +5925,7 @@
     </p:spTree>
     <p:extLst>
       <p:ext uri="{BB962C8B-B14F-4D97-AF65-F5344CB8AC3E}">
-        <p14:creationId xmlns:p14="http://schemas.microsoft.com/office/powerpoint/2010/main" val="2090266173"/>
+        <p14:creationId xmlns:p14="http://schemas.microsoft.com/office/powerpoint/2010/main" val="1315704433"/>
       </p:ext>
     </p:extLst>
   </p:cSld>
@@ -3607,8 +5974,8 @@
         </p:blipFill>
         <p:spPr>
           <a:xfrm>
-            <a:off x="620486" y="1001627"/>
-            <a:ext cx="10813638" cy="4854745"/>
+            <a:off x="620486" y="769053"/>
+            <a:ext cx="10813638" cy="5319892"/>
           </a:xfrm>
           <a:prstGeom prst="rect">
             <a:avLst/>
@@ -3618,7 +5985,7 @@
     </p:spTree>
     <p:extLst>
       <p:ext uri="{BB962C8B-B14F-4D97-AF65-F5344CB8AC3E}">
-        <p14:creationId xmlns:p14="http://schemas.microsoft.com/office/powerpoint/2010/main" val="2070372896"/>
+        <p14:creationId xmlns:p14="http://schemas.microsoft.com/office/powerpoint/2010/main" val="2090266173"/>
       </p:ext>
     </p:extLst>
   </p:cSld>
@@ -3667,8 +6034,8 @@
         </p:blipFill>
         <p:spPr>
           <a:xfrm>
-            <a:off x="620486" y="987210"/>
-            <a:ext cx="10813638" cy="4883578"/>
+            <a:off x="620486" y="1001627"/>
+            <a:ext cx="10813638" cy="4854745"/>
           </a:xfrm>
           <a:prstGeom prst="rect">
             <a:avLst/>
@@ -3678,7 +6045,7 @@
     </p:spTree>
     <p:extLst>
       <p:ext uri="{BB962C8B-B14F-4D97-AF65-F5344CB8AC3E}">
-        <p14:creationId xmlns:p14="http://schemas.microsoft.com/office/powerpoint/2010/main" val="1585107699"/>
+        <p14:creationId xmlns:p14="http://schemas.microsoft.com/office/powerpoint/2010/main" val="2070372896"/>
       </p:ext>
     </p:extLst>
   </p:cSld>
@@ -3727,8 +6094,8 @@
         </p:blipFill>
         <p:spPr>
           <a:xfrm>
-            <a:off x="620486" y="768914"/>
-            <a:ext cx="10813638" cy="5320171"/>
+            <a:off x="620486" y="987210"/>
+            <a:ext cx="10813638" cy="4883578"/>
           </a:xfrm>
           <a:prstGeom prst="rect">
             <a:avLst/>
@@ -3738,7 +6105,7 @@
     </p:spTree>
     <p:extLst>
       <p:ext uri="{BB962C8B-B14F-4D97-AF65-F5344CB8AC3E}">
-        <p14:creationId xmlns:p14="http://schemas.microsoft.com/office/powerpoint/2010/main" val="1193378959"/>
+        <p14:creationId xmlns:p14="http://schemas.microsoft.com/office/powerpoint/2010/main" val="1585107699"/>
       </p:ext>
     </p:extLst>
   </p:cSld>
@@ -3787,8 +6154,8 @@
         </p:blipFill>
         <p:spPr>
           <a:xfrm>
-            <a:off x="620486" y="292858"/>
-            <a:ext cx="10813638" cy="6272282"/>
+            <a:off x="620486" y="768914"/>
+            <a:ext cx="10813638" cy="5320171"/>
           </a:xfrm>
           <a:prstGeom prst="rect">
             <a:avLst/>
@@ -3798,7 +6165,7 @@
     </p:spTree>
     <p:extLst>
       <p:ext uri="{BB962C8B-B14F-4D97-AF65-F5344CB8AC3E}">
-        <p14:creationId xmlns:p14="http://schemas.microsoft.com/office/powerpoint/2010/main" val="1961866488"/>
+        <p14:creationId xmlns:p14="http://schemas.microsoft.com/office/powerpoint/2010/main" val="1193378959"/>
       </p:ext>
     </p:extLst>
   </p:cSld>
